--- a/slides/Presentation2.pptx
+++ b/slides/Presentation2.pptx
@@ -3141,9 +3141,77 @@
           </a:p>
         </p:txBody>
       </p:sp>
-      <p:sp>
-        <p:nvSpPr>
-          <p:cNvPr id="3" name="TextBox 2"/>
+      <p:pic>
+        <p:nvPicPr>
+          <p:cNvPr id="3" name="Picture 2" descr="decor_network.png"/>
+          <p:cNvPicPr>
+            <a:picLocks noChangeAspect="1"/>
+          </p:cNvPicPr>
+          <p:nvPr/>
+        </p:nvPicPr>
+        <p:blipFill>
+          <a:blip r:embed="rId2"/>
+          <a:stretch>
+            <a:fillRect/>
+          </a:stretch>
+        </p:blipFill>
+        <p:spPr>
+          <a:xfrm>
+            <a:off x="9037015" y="4297680"/>
+            <a:ext cx="2834640" cy="2834640"/>
+          </a:xfrm>
+          <a:prstGeom prst="rect">
+            <a:avLst/>
+          </a:prstGeom>
+        </p:spPr>
+      </p:pic>
+      <p:sp>
+        <p:nvSpPr>
+          <p:cNvPr id="4" name="Rectangle 3"/>
+          <p:cNvSpPr/>
+          <p:nvPr/>
+        </p:nvSpPr>
+        <p:spPr>
+          <a:xfrm>
+            <a:off x="502920" y="2359152"/>
+            <a:ext cx="82296" cy="1417320"/>
+          </a:xfrm>
+          <a:prstGeom prst="rect">
+            <a:avLst/>
+          </a:prstGeom>
+          <a:solidFill>
+            <a:srgbClr val="EB6834"/>
+          </a:solidFill>
+          <a:ln>
+            <a:noFill/>
+          </a:ln>
+          <a:effectLst/>
+        </p:spPr>
+        <p:style>
+          <a:lnRef idx="1">
+            <a:schemeClr val="accent1"/>
+          </a:lnRef>
+          <a:fillRef idx="3">
+            <a:schemeClr val="accent1"/>
+          </a:fillRef>
+          <a:effectRef idx="2">
+            <a:schemeClr val="accent1"/>
+          </a:effectRef>
+          <a:fontRef idx="minor">
+            <a:schemeClr val="lt1"/>
+          </a:fontRef>
+        </p:style>
+        <p:txBody>
+          <a:bodyPr rtlCol="0" anchor="ctr"/>
+          <a:lstStyle/>
+          <a:p>
+            <a:pPr algn="ctr"/>
+          </a:p>
+        </p:txBody>
+      </p:sp>
+      <p:sp>
+        <p:nvSpPr>
+          <p:cNvPr id="5" name="TextBox 4"/>
           <p:cNvSpPr txBox="1"/>
           <p:nvPr/>
         </p:nvSpPr>
@@ -3182,7 +3250,7 @@
       </p:sp>
       <p:sp>
         <p:nvSpPr>
-          <p:cNvPr id="4" name="TextBox 3"/>
+          <p:cNvPr id="6" name="TextBox 5"/>
           <p:cNvSpPr txBox="1"/>
           <p:nvPr/>
         </p:nvSpPr>
@@ -3237,7 +3305,7 @@
       </p:sp>
       <p:sp>
         <p:nvSpPr>
-          <p:cNvPr id="5" name="TextBox 4"/>
+          <p:cNvPr id="7" name="TextBox 6"/>
           <p:cNvSpPr txBox="1"/>
           <p:nvPr/>
         </p:nvSpPr>
@@ -3276,7 +3344,7 @@
       </p:sp>
       <p:sp>
         <p:nvSpPr>
-          <p:cNvPr id="6" name="TextBox 5"/>
+          <p:cNvPr id="8" name="TextBox 7"/>
           <p:cNvSpPr txBox="1"/>
           <p:nvPr/>
         </p:nvSpPr>
@@ -3375,9 +3443,77 @@
           </a:p>
         </p:txBody>
       </p:sp>
-      <p:sp>
-        <p:nvSpPr>
-          <p:cNvPr id="3" name="TextBox 2"/>
+      <p:pic>
+        <p:nvPicPr>
+          <p:cNvPr id="3" name="Picture 2" descr="decor_network.png"/>
+          <p:cNvPicPr>
+            <a:picLocks noChangeAspect="1"/>
+          </p:cNvPicPr>
+          <p:nvPr/>
+        </p:nvPicPr>
+        <p:blipFill>
+          <a:blip r:embed="rId2"/>
+          <a:stretch>
+            <a:fillRect/>
+          </a:stretch>
+        </p:blipFill>
+        <p:spPr>
+          <a:xfrm>
+            <a:off x="9357055" y="822960"/>
+            <a:ext cx="2377440" cy="2377440"/>
+          </a:xfrm>
+          <a:prstGeom prst="rect">
+            <a:avLst/>
+          </a:prstGeom>
+        </p:spPr>
+      </p:pic>
+      <p:sp>
+        <p:nvSpPr>
+          <p:cNvPr id="4" name="Rectangle 3"/>
+          <p:cNvSpPr/>
+          <p:nvPr/>
+        </p:nvSpPr>
+        <p:spPr>
+          <a:xfrm>
+            <a:off x="502920" y="2404872"/>
+            <a:ext cx="82296" cy="868680"/>
+          </a:xfrm>
+          <a:prstGeom prst="rect">
+            <a:avLst/>
+          </a:prstGeom>
+          <a:solidFill>
+            <a:srgbClr val="EB6834"/>
+          </a:solidFill>
+          <a:ln>
+            <a:noFill/>
+          </a:ln>
+          <a:effectLst/>
+        </p:spPr>
+        <p:style>
+          <a:lnRef idx="1">
+            <a:schemeClr val="accent1"/>
+          </a:lnRef>
+          <a:fillRef idx="3">
+            <a:schemeClr val="accent1"/>
+          </a:fillRef>
+          <a:effectRef idx="2">
+            <a:schemeClr val="accent1"/>
+          </a:effectRef>
+          <a:fontRef idx="minor">
+            <a:schemeClr val="lt1"/>
+          </a:fontRef>
+        </p:style>
+        <p:txBody>
+          <a:bodyPr rtlCol="0" anchor="ctr"/>
+          <a:lstStyle/>
+          <a:p>
+            <a:pPr algn="ctr"/>
+          </a:p>
+        </p:txBody>
+      </p:sp>
+      <p:sp>
+        <p:nvSpPr>
+          <p:cNvPr id="5" name="TextBox 4"/>
           <p:cNvSpPr txBox="1"/>
           <p:nvPr/>
         </p:nvSpPr>
@@ -3416,7 +3552,7 @@
       </p:sp>
       <p:sp>
         <p:nvSpPr>
-          <p:cNvPr id="4" name="TextBox 3"/>
+          <p:cNvPr id="6" name="TextBox 5"/>
           <p:cNvSpPr txBox="1"/>
           <p:nvPr/>
         </p:nvSpPr>
@@ -3455,7 +3591,7 @@
       </p:sp>
       <p:sp>
         <p:nvSpPr>
-          <p:cNvPr id="5" name="TextBox 4"/>
+          <p:cNvPr id="7" name="TextBox 6"/>
           <p:cNvSpPr txBox="1"/>
           <p:nvPr/>
         </p:nvSpPr>
@@ -3494,7 +3630,7 @@
       </p:sp>
       <p:sp>
         <p:nvSpPr>
-          <p:cNvPr id="6" name="TextBox 5"/>
+          <p:cNvPr id="8" name="TextBox 7"/>
           <p:cNvSpPr txBox="1"/>
           <p:nvPr/>
         </p:nvSpPr>
@@ -4316,35 +4452,53 @@
       </p:sp>
       <p:sp>
         <p:nvSpPr>
-          <p:cNvPr id="18" name="TextBox 17"/>
-          <p:cNvSpPr txBox="1"/>
-          <p:nvPr/>
-        </p:nvSpPr>
-        <p:spPr>
-          <a:xfrm>
-            <a:off x="640080" y="6172200"/>
-            <a:ext cx="10881360" cy="548640"/>
-          </a:xfrm>
-          <a:prstGeom prst="rect">
-            <a:avLst/>
-          </a:prstGeom>
-          <a:noFill/>
-        </p:spPr>
-        <p:txBody>
-          <a:bodyPr wrap="square" anchor="t">
-            <a:spAutoFit/>
-          </a:bodyPr>
-          <a:lstStyle/>
-          <a:p>
-            <a:pPr algn="l">
-              <a:lnSpc>
-                <a:spcPct val="118000"/>
-              </a:lnSpc>
-            </a:pPr>
-            <a:r>
-              <a:rPr sz="1500" b="0" i="0">
-                <a:solidFill>
-                  <a:srgbClr val="55503F"/>
+          <p:cNvPr id="18" name="Rounded Rectangle 17"/>
+          <p:cNvSpPr/>
+          <p:nvPr/>
+        </p:nvSpPr>
+        <p:spPr>
+          <a:xfrm>
+            <a:off x="640080" y="6035040"/>
+            <a:ext cx="10881360" cy="594360"/>
+          </a:xfrm>
+          <a:prstGeom prst="roundRect">
+            <a:avLst>
+              <a:gd name="adj" fmla="val 8000"/>
+            </a:avLst>
+          </a:prstGeom>
+          <a:solidFill>
+            <a:srgbClr val="F1EFE8"/>
+          </a:solidFill>
+          <a:ln w="17780">
+            <a:solidFill>
+              <a:srgbClr val="DDD8CD"/>
+            </a:solidFill>
+          </a:ln>
+          <a:effectLst/>
+        </p:spPr>
+        <p:style>
+          <a:lnRef idx="1">
+            <a:schemeClr val="accent1"/>
+          </a:lnRef>
+          <a:fillRef idx="3">
+            <a:schemeClr val="accent1"/>
+          </a:fillRef>
+          <a:effectRef idx="2">
+            <a:schemeClr val="accent1"/>
+          </a:effectRef>
+          <a:fontRef idx="minor">
+            <a:schemeClr val="lt1"/>
+          </a:fontRef>
+        </p:style>
+        <p:txBody>
+          <a:bodyPr rtlCol="0" anchor="ctr" wrap="square" lIns="109728" rIns="109728"/>
+          <a:lstStyle/>
+          <a:p>
+            <a:pPr algn="ctr"/>
+            <a:r>
+              <a:rPr sz="1400" b="0">
+                <a:solidFill>
+                  <a:srgbClr val="19180F"/>
                 </a:solidFill>
                 <a:latin typeface="Calibri"/>
               </a:rPr>
@@ -4614,35 +4768,53 @@
       </p:sp>
       <p:sp>
         <p:nvSpPr>
-          <p:cNvPr id="6" name="TextBox 5"/>
-          <p:cNvSpPr txBox="1"/>
-          <p:nvPr/>
-        </p:nvSpPr>
-        <p:spPr>
-          <a:xfrm>
-            <a:off x="640080" y="6172200"/>
-            <a:ext cx="10881360" cy="548640"/>
-          </a:xfrm>
-          <a:prstGeom prst="rect">
-            <a:avLst/>
-          </a:prstGeom>
-          <a:noFill/>
-        </p:spPr>
-        <p:txBody>
-          <a:bodyPr wrap="square" anchor="t">
-            <a:spAutoFit/>
-          </a:bodyPr>
-          <a:lstStyle/>
-          <a:p>
-            <a:pPr algn="l">
-              <a:lnSpc>
-                <a:spcPct val="118000"/>
-              </a:lnSpc>
-            </a:pPr>
-            <a:r>
-              <a:rPr sz="1500" b="1" i="0">
-                <a:solidFill>
-                  <a:srgbClr val="EB6834"/>
+          <p:cNvPr id="6" name="Rounded Rectangle 5"/>
+          <p:cNvSpPr/>
+          <p:nvPr/>
+        </p:nvSpPr>
+        <p:spPr>
+          <a:xfrm>
+            <a:off x="640080" y="6035040"/>
+            <a:ext cx="10881360" cy="594360"/>
+          </a:xfrm>
+          <a:prstGeom prst="roundRect">
+            <a:avLst>
+              <a:gd name="adj" fmla="val 8000"/>
+            </a:avLst>
+          </a:prstGeom>
+          <a:solidFill>
+            <a:srgbClr val="E9F0FA"/>
+          </a:solidFill>
+          <a:ln w="17780">
+            <a:solidFill>
+              <a:srgbClr val="2A78D6"/>
+            </a:solidFill>
+          </a:ln>
+          <a:effectLst/>
+        </p:spPr>
+        <p:style>
+          <a:lnRef idx="1">
+            <a:schemeClr val="accent1"/>
+          </a:lnRef>
+          <a:fillRef idx="3">
+            <a:schemeClr val="accent1"/>
+          </a:fillRef>
+          <a:effectRef idx="2">
+            <a:schemeClr val="accent1"/>
+          </a:effectRef>
+          <a:fontRef idx="minor">
+            <a:schemeClr val="lt1"/>
+          </a:fontRef>
+        </p:style>
+        <p:txBody>
+          <a:bodyPr rtlCol="0" anchor="ctr" wrap="square" lIns="109728" rIns="109728"/>
+          <a:lstStyle/>
+          <a:p>
+            <a:pPr algn="ctr"/>
+            <a:r>
+              <a:rPr sz="1400" b="1">
+                <a:solidFill>
+                  <a:srgbClr val="19180F"/>
                 </a:solidFill>
                 <a:latin typeface="Calibri"/>
               </a:rPr>
@@ -4912,35 +5084,53 @@
       </p:sp>
       <p:sp>
         <p:nvSpPr>
-          <p:cNvPr id="6" name="TextBox 5"/>
-          <p:cNvSpPr txBox="1"/>
-          <p:nvPr/>
-        </p:nvSpPr>
-        <p:spPr>
-          <a:xfrm>
-            <a:off x="640080" y="6172200"/>
-            <a:ext cx="10881360" cy="548640"/>
-          </a:xfrm>
-          <a:prstGeom prst="rect">
-            <a:avLst/>
-          </a:prstGeom>
-          <a:noFill/>
-        </p:spPr>
-        <p:txBody>
-          <a:bodyPr wrap="square" anchor="t">
-            <a:spAutoFit/>
-          </a:bodyPr>
-          <a:lstStyle/>
-          <a:p>
-            <a:pPr algn="l">
-              <a:lnSpc>
-                <a:spcPct val="118000"/>
-              </a:lnSpc>
-            </a:pPr>
-            <a:r>
-              <a:rPr sz="1500" b="1" i="0">
-                <a:solidFill>
-                  <a:srgbClr val="EB6834"/>
+          <p:cNvPr id="6" name="Rounded Rectangle 5"/>
+          <p:cNvSpPr/>
+          <p:nvPr/>
+        </p:nvSpPr>
+        <p:spPr>
+          <a:xfrm>
+            <a:off x="640080" y="6035040"/>
+            <a:ext cx="10881360" cy="594360"/>
+          </a:xfrm>
+          <a:prstGeom prst="roundRect">
+            <a:avLst>
+              <a:gd name="adj" fmla="val 8000"/>
+            </a:avLst>
+          </a:prstGeom>
+          <a:solidFill>
+            <a:srgbClr val="E9F0FA"/>
+          </a:solidFill>
+          <a:ln w="17780">
+            <a:solidFill>
+              <a:srgbClr val="2A78D6"/>
+            </a:solidFill>
+          </a:ln>
+          <a:effectLst/>
+        </p:spPr>
+        <p:style>
+          <a:lnRef idx="1">
+            <a:schemeClr val="accent1"/>
+          </a:lnRef>
+          <a:fillRef idx="3">
+            <a:schemeClr val="accent1"/>
+          </a:fillRef>
+          <a:effectRef idx="2">
+            <a:schemeClr val="accent1"/>
+          </a:effectRef>
+          <a:fontRef idx="minor">
+            <a:schemeClr val="lt1"/>
+          </a:fontRef>
+        </p:style>
+        <p:txBody>
+          <a:bodyPr rtlCol="0" anchor="ctr" wrap="square" lIns="109728" rIns="109728"/>
+          <a:lstStyle/>
+          <a:p>
+            <a:pPr algn="ctr"/>
+            <a:r>
+              <a:rPr sz="1400" b="1">
+                <a:solidFill>
+                  <a:srgbClr val="19180F"/>
                 </a:solidFill>
                 <a:latin typeface="Calibri"/>
               </a:rPr>
@@ -5144,8 +5334,8 @@
         </p:blipFill>
         <p:spPr>
           <a:xfrm>
-            <a:off x="1712080" y="1417320"/>
-            <a:ext cx="8767535" cy="4160520"/>
+            <a:off x="1904774" y="1417320"/>
+            <a:ext cx="8382147" cy="3977639"/>
           </a:xfrm>
           <a:prstGeom prst="rect">
             <a:avLst/>
@@ -5154,35 +5344,53 @@
       </p:pic>
       <p:sp>
         <p:nvSpPr>
-          <p:cNvPr id="6" name="TextBox 5"/>
-          <p:cNvSpPr txBox="1"/>
-          <p:nvPr/>
-        </p:nvSpPr>
-        <p:spPr>
-          <a:xfrm>
-            <a:off x="640080" y="6172200"/>
-            <a:ext cx="10881360" cy="548640"/>
-          </a:xfrm>
-          <a:prstGeom prst="rect">
-            <a:avLst/>
-          </a:prstGeom>
-          <a:noFill/>
-        </p:spPr>
-        <p:txBody>
-          <a:bodyPr wrap="square" anchor="t">
-            <a:spAutoFit/>
-          </a:bodyPr>
-          <a:lstStyle/>
-          <a:p>
-            <a:pPr algn="l">
-              <a:lnSpc>
-                <a:spcPct val="118000"/>
-              </a:lnSpc>
-            </a:pPr>
-            <a:r>
-              <a:rPr sz="1500" b="1" i="0">
-                <a:solidFill>
-                  <a:srgbClr val="EB6834"/>
+          <p:cNvPr id="6" name="Rounded Rectangle 5"/>
+          <p:cNvSpPr/>
+          <p:nvPr/>
+        </p:nvSpPr>
+        <p:spPr>
+          <a:xfrm>
+            <a:off x="640080" y="5806440"/>
+            <a:ext cx="10881360" cy="777240"/>
+          </a:xfrm>
+          <a:prstGeom prst="roundRect">
+            <a:avLst>
+              <a:gd name="adj" fmla="val 8000"/>
+            </a:avLst>
+          </a:prstGeom>
+          <a:solidFill>
+            <a:srgbClr val="E9F0FA"/>
+          </a:solidFill>
+          <a:ln w="17780">
+            <a:solidFill>
+              <a:srgbClr val="2A78D6"/>
+            </a:solidFill>
+          </a:ln>
+          <a:effectLst/>
+        </p:spPr>
+        <p:style>
+          <a:lnRef idx="1">
+            <a:schemeClr val="accent1"/>
+          </a:lnRef>
+          <a:fillRef idx="3">
+            <a:schemeClr val="accent1"/>
+          </a:fillRef>
+          <a:effectRef idx="2">
+            <a:schemeClr val="accent1"/>
+          </a:effectRef>
+          <a:fontRef idx="minor">
+            <a:schemeClr val="lt1"/>
+          </a:fontRef>
+        </p:style>
+        <p:txBody>
+          <a:bodyPr rtlCol="0" anchor="ctr" wrap="square" lIns="109728" rIns="109728"/>
+          <a:lstStyle/>
+          <a:p>
+            <a:pPr algn="ctr"/>
+            <a:r>
+              <a:rPr sz="1400" b="1">
+                <a:solidFill>
+                  <a:srgbClr val="19180F"/>
                 </a:solidFill>
                 <a:latin typeface="Calibri"/>
               </a:rPr>
@@ -5386,8 +5594,8 @@
         </p:blipFill>
         <p:spPr>
           <a:xfrm>
-            <a:off x="1395736" y="1417320"/>
-            <a:ext cx="9400223" cy="4480560"/>
+            <a:off x="1635537" y="1417320"/>
+            <a:ext cx="8920620" cy="4251960"/>
           </a:xfrm>
           <a:prstGeom prst="rect">
             <a:avLst/>
@@ -5396,35 +5604,53 @@
       </p:pic>
       <p:sp>
         <p:nvSpPr>
-          <p:cNvPr id="6" name="TextBox 5"/>
-          <p:cNvSpPr txBox="1"/>
-          <p:nvPr/>
-        </p:nvSpPr>
-        <p:spPr>
-          <a:xfrm>
-            <a:off x="640080" y="6172200"/>
-            <a:ext cx="10881360" cy="548640"/>
-          </a:xfrm>
-          <a:prstGeom prst="rect">
-            <a:avLst/>
-          </a:prstGeom>
-          <a:noFill/>
-        </p:spPr>
-        <p:txBody>
-          <a:bodyPr wrap="square" anchor="t">
-            <a:spAutoFit/>
-          </a:bodyPr>
-          <a:lstStyle/>
-          <a:p>
-            <a:pPr algn="l">
-              <a:lnSpc>
-                <a:spcPct val="118000"/>
-              </a:lnSpc>
-            </a:pPr>
-            <a:r>
-              <a:rPr sz="1500" b="0" i="0">
-                <a:solidFill>
-                  <a:srgbClr val="55503F"/>
+          <p:cNvPr id="6" name="Rounded Rectangle 5"/>
+          <p:cNvSpPr/>
+          <p:nvPr/>
+        </p:nvSpPr>
+        <p:spPr>
+          <a:xfrm>
+            <a:off x="640080" y="5806440"/>
+            <a:ext cx="10881360" cy="640080"/>
+          </a:xfrm>
+          <a:prstGeom prst="roundRect">
+            <a:avLst>
+              <a:gd name="adj" fmla="val 8000"/>
+            </a:avLst>
+          </a:prstGeom>
+          <a:solidFill>
+            <a:srgbClr val="F1EFE8"/>
+          </a:solidFill>
+          <a:ln w="17780">
+            <a:solidFill>
+              <a:srgbClr val="DDD8CD"/>
+            </a:solidFill>
+          </a:ln>
+          <a:effectLst/>
+        </p:spPr>
+        <p:style>
+          <a:lnRef idx="1">
+            <a:schemeClr val="accent1"/>
+          </a:lnRef>
+          <a:fillRef idx="3">
+            <a:schemeClr val="accent1"/>
+          </a:fillRef>
+          <a:effectRef idx="2">
+            <a:schemeClr val="accent1"/>
+          </a:effectRef>
+          <a:fontRef idx="minor">
+            <a:schemeClr val="lt1"/>
+          </a:fontRef>
+        </p:style>
+        <p:txBody>
+          <a:bodyPr rtlCol="0" anchor="ctr" wrap="square" lIns="109728" rIns="109728"/>
+          <a:lstStyle/>
+          <a:p>
+            <a:pPr algn="ctr"/>
+            <a:r>
+              <a:rPr sz="1400" b="0">
+                <a:solidFill>
+                  <a:srgbClr val="19180F"/>
                 </a:solidFill>
                 <a:latin typeface="Calibri"/>
               </a:rPr>
@@ -5628,8 +5854,8 @@
         </p:blipFill>
         <p:spPr>
           <a:xfrm>
-            <a:off x="1726047" y="1417320"/>
-            <a:ext cx="8739600" cy="4480560"/>
+            <a:off x="1948996" y="1417320"/>
+            <a:ext cx="8293702" cy="4251960"/>
           </a:xfrm>
           <a:prstGeom prst="rect">
             <a:avLst/>
@@ -5638,35 +5864,53 @@
       </p:pic>
       <p:sp>
         <p:nvSpPr>
-          <p:cNvPr id="6" name="TextBox 5"/>
-          <p:cNvSpPr txBox="1"/>
-          <p:nvPr/>
-        </p:nvSpPr>
-        <p:spPr>
-          <a:xfrm>
-            <a:off x="640080" y="6172200"/>
-            <a:ext cx="10881360" cy="548640"/>
-          </a:xfrm>
-          <a:prstGeom prst="rect">
-            <a:avLst/>
-          </a:prstGeom>
-          <a:noFill/>
-        </p:spPr>
-        <p:txBody>
-          <a:bodyPr wrap="square" anchor="t">
-            <a:spAutoFit/>
-          </a:bodyPr>
-          <a:lstStyle/>
-          <a:p>
-            <a:pPr algn="l">
-              <a:lnSpc>
-                <a:spcPct val="118000"/>
-              </a:lnSpc>
-            </a:pPr>
-            <a:r>
-              <a:rPr sz="1500" b="0" i="0">
-                <a:solidFill>
-                  <a:srgbClr val="55503F"/>
+          <p:cNvPr id="6" name="Rounded Rectangle 5"/>
+          <p:cNvSpPr/>
+          <p:nvPr/>
+        </p:nvSpPr>
+        <p:spPr>
+          <a:xfrm>
+            <a:off x="640080" y="5806440"/>
+            <a:ext cx="10881360" cy="640080"/>
+          </a:xfrm>
+          <a:prstGeom prst="roundRect">
+            <a:avLst>
+              <a:gd name="adj" fmla="val 8000"/>
+            </a:avLst>
+          </a:prstGeom>
+          <a:solidFill>
+            <a:srgbClr val="F1EFE8"/>
+          </a:solidFill>
+          <a:ln w="17780">
+            <a:solidFill>
+              <a:srgbClr val="DDD8CD"/>
+            </a:solidFill>
+          </a:ln>
+          <a:effectLst/>
+        </p:spPr>
+        <p:style>
+          <a:lnRef idx="1">
+            <a:schemeClr val="accent1"/>
+          </a:lnRef>
+          <a:fillRef idx="3">
+            <a:schemeClr val="accent1"/>
+          </a:fillRef>
+          <a:effectRef idx="2">
+            <a:schemeClr val="accent1"/>
+          </a:effectRef>
+          <a:fontRef idx="minor">
+            <a:schemeClr val="lt1"/>
+          </a:fontRef>
+        </p:style>
+        <p:txBody>
+          <a:bodyPr rtlCol="0" anchor="ctr" wrap="square" lIns="109728" rIns="109728"/>
+          <a:lstStyle/>
+          <a:p>
+            <a:pPr algn="ctr"/>
+            <a:r>
+              <a:rPr sz="1400" b="0">
+                <a:solidFill>
+                  <a:srgbClr val="19180F"/>
                 </a:solidFill>
                 <a:latin typeface="Calibri"/>
               </a:rPr>
@@ -5862,7 +6106,62 @@
         </p:nvSpPr>
         <p:spPr>
           <a:xfrm>
-            <a:off x="640080" y="1600200"/>
+            <a:off x="640080" y="1536192"/>
+            <a:ext cx="2221992" cy="292608"/>
+          </a:xfrm>
+          <a:prstGeom prst="roundRect">
+            <a:avLst>
+              <a:gd name="adj" fmla="val 50000"/>
+            </a:avLst>
+          </a:prstGeom>
+          <a:solidFill>
+            <a:srgbClr val="2E9E5B"/>
+          </a:solidFill>
+          <a:ln>
+            <a:noFill/>
+          </a:ln>
+          <a:effectLst/>
+        </p:spPr>
+        <p:style>
+          <a:lnRef idx="1">
+            <a:schemeClr val="accent1"/>
+          </a:lnRef>
+          <a:fillRef idx="3">
+            <a:schemeClr val="accent1"/>
+          </a:fillRef>
+          <a:effectRef idx="2">
+            <a:schemeClr val="accent1"/>
+          </a:effectRef>
+          <a:fontRef idx="minor">
+            <a:schemeClr val="lt1"/>
+          </a:fontRef>
+        </p:style>
+        <p:txBody>
+          <a:bodyPr rtlCol="0" anchor="ctr" wrap="none" lIns="73152" rIns="73152"/>
+          <a:lstStyle/>
+          <a:p>
+            <a:pPr algn="ctr"/>
+            <a:r>
+              <a:rPr sz="1100" b="1">
+                <a:solidFill>
+                  <a:srgbClr val="FFFFFF"/>
+                </a:solidFill>
+                <a:latin typeface="Calibri"/>
+              </a:rPr>
+              <a:t>HEADLINE FINDING</a:t>
+            </a:r>
+          </a:p>
+        </p:txBody>
+      </p:sp>
+      <p:sp>
+        <p:nvSpPr>
+          <p:cNvPr id="6" name="Rounded Rectangle 5"/>
+          <p:cNvSpPr/>
+          <p:nvPr/>
+        </p:nvSpPr>
+        <p:spPr>
+          <a:xfrm>
+            <a:off x="640080" y="1874519"/>
             <a:ext cx="10881360" cy="1005840"/>
           </a:xfrm>
           <a:prstGeom prst="roundRect">
@@ -5913,13 +6212,13 @@
       </p:sp>
       <p:sp>
         <p:nvSpPr>
-          <p:cNvPr id="6" name="TextBox 5"/>
+          <p:cNvPr id="7" name="TextBox 6"/>
           <p:cNvSpPr txBox="1"/>
           <p:nvPr/>
         </p:nvSpPr>
         <p:spPr>
           <a:xfrm>
-            <a:off x="640080" y="2880360"/>
+            <a:off x="640080" y="3154680"/>
             <a:ext cx="10881360" cy="3017520"/>
           </a:xfrm>
           <a:prstGeom prst="rect">
@@ -5993,7 +6292,7 @@
       </p:sp>
       <p:sp>
         <p:nvSpPr>
-          <p:cNvPr id="7" name="TextBox 6"/>
+          <p:cNvPr id="8" name="TextBox 7"/>
           <p:cNvSpPr txBox="1"/>
           <p:nvPr/>
         </p:nvSpPr>

--- a/slides/Presentation2.pptx
+++ b/slides/Presentation2.pptx
@@ -4694,8 +4694,8 @@
         </p:nvSpPr>
         <p:spPr>
           <a:xfrm>
-            <a:off x="640080" y="1737360"/>
-            <a:ext cx="10881360" cy="3840480"/>
+            <a:off x="640080" y="1828800"/>
+            <a:ext cx="5212080" cy="3840480"/>
           </a:xfrm>
           <a:prstGeom prst="rect">
             <a:avLst/>
@@ -4713,11 +4713,11 @@
                 <a:spcPct val="125000"/>
               </a:lnSpc>
               <a:spcAft>
-                <a:spcPts val="1800"/>
+                <a:spcPts val="1600"/>
               </a:spcAft>
             </a:pPr>
             <a:r>
-              <a:rPr sz="1700">
+              <a:rPr sz="1550">
                 <a:solidFill>
                   <a:srgbClr val="19180F"/>
                 </a:solidFill>
@@ -4732,11 +4732,11 @@
                 <a:spcPct val="125000"/>
               </a:lnSpc>
               <a:spcAft>
-                <a:spcPts val="1800"/>
+                <a:spcPts val="1600"/>
               </a:spcAft>
             </a:pPr>
             <a:r>
-              <a:rPr sz="1700">
+              <a:rPr sz="1550">
                 <a:solidFill>
                   <a:srgbClr val="19180F"/>
                 </a:solidFill>
@@ -4751,11 +4751,11 @@
                 <a:spcPct val="125000"/>
               </a:lnSpc>
               <a:spcAft>
-                <a:spcPts val="1800"/>
+                <a:spcPts val="1600"/>
               </a:spcAft>
             </a:pPr>
             <a:r>
-              <a:rPr sz="1700">
+              <a:rPr sz="1550">
                 <a:solidFill>
                   <a:srgbClr val="19180F"/>
                 </a:solidFill>
@@ -4766,9 +4766,33 @@
           </a:p>
         </p:txBody>
       </p:sp>
-      <p:sp>
-        <p:nvSpPr>
-          <p:cNvPr id="6" name="Rounded Rectangle 5"/>
+      <p:pic>
+        <p:nvPicPr>
+          <p:cNvPr id="6" name="Picture 5" descr="fig_p2_result1_arrows.png"/>
+          <p:cNvPicPr>
+            <a:picLocks noChangeAspect="1"/>
+          </p:cNvPicPr>
+          <p:nvPr/>
+        </p:nvPicPr>
+        <p:blipFill>
+          <a:blip r:embed="rId2"/>
+          <a:stretch>
+            <a:fillRect/>
+          </a:stretch>
+        </p:blipFill>
+        <p:spPr>
+          <a:xfrm>
+            <a:off x="6126480" y="1783080"/>
+            <a:ext cx="5096962" cy="3794760"/>
+          </a:xfrm>
+          <a:prstGeom prst="rect">
+            <a:avLst/>
+          </a:prstGeom>
+        </p:spPr>
+      </p:pic>
+      <p:sp>
+        <p:nvSpPr>
+          <p:cNvPr id="7" name="Rounded Rectangle 6"/>
           <p:cNvSpPr/>
           <p:nvPr/>
         </p:nvSpPr>
@@ -4825,7 +4849,7 @@
       </p:sp>
       <p:sp>
         <p:nvSpPr>
-          <p:cNvPr id="7" name="TextBox 6"/>
+          <p:cNvPr id="8" name="TextBox 7"/>
           <p:cNvSpPr txBox="1"/>
           <p:nvPr/>
         </p:nvSpPr>
@@ -5010,8 +5034,8 @@
         </p:nvSpPr>
         <p:spPr>
           <a:xfrm>
-            <a:off x="640080" y="1737360"/>
-            <a:ext cx="10881360" cy="3200400"/>
+            <a:off x="640080" y="1874519"/>
+            <a:ext cx="5212080" cy="3566160"/>
           </a:xfrm>
           <a:prstGeom prst="rect">
             <a:avLst/>
@@ -5033,7 +5057,7 @@
               </a:spcAft>
             </a:pPr>
             <a:r>
-              <a:rPr sz="1700">
+              <a:rPr sz="1550">
                 <a:solidFill>
                   <a:srgbClr val="19180F"/>
                 </a:solidFill>
@@ -5052,7 +5076,7 @@
               </a:spcAft>
             </a:pPr>
             <a:r>
-              <a:rPr sz="1700">
+              <a:rPr sz="1550">
                 <a:solidFill>
                   <a:srgbClr val="19180F"/>
                 </a:solidFill>
@@ -5071,7 +5095,7 @@
               </a:spcAft>
             </a:pPr>
             <a:r>
-              <a:rPr sz="1700">
+              <a:rPr sz="1550">
                 <a:solidFill>
                   <a:srgbClr val="19180F"/>
                 </a:solidFill>
@@ -5082,9 +5106,33 @@
           </a:p>
         </p:txBody>
       </p:sp>
-      <p:sp>
-        <p:nvSpPr>
-          <p:cNvPr id="6" name="Rounded Rectangle 5"/>
+      <p:pic>
+        <p:nvPicPr>
+          <p:cNvPr id="6" name="Picture 5" descr="fig_p2_naive_reveal.png"/>
+          <p:cNvPicPr>
+            <a:picLocks noChangeAspect="1"/>
+          </p:cNvPicPr>
+          <p:nvPr/>
+        </p:nvPicPr>
+        <p:blipFill>
+          <a:blip r:embed="rId2"/>
+          <a:stretch>
+            <a:fillRect/>
+          </a:stretch>
+        </p:blipFill>
+        <p:spPr>
+          <a:xfrm>
+            <a:off x="6126480" y="1783080"/>
+            <a:ext cx="5833531" cy="3794760"/>
+          </a:xfrm>
+          <a:prstGeom prst="rect">
+            <a:avLst/>
+          </a:prstGeom>
+        </p:spPr>
+      </p:pic>
+      <p:sp>
+        <p:nvSpPr>
+          <p:cNvPr id="7" name="Rounded Rectangle 6"/>
           <p:cNvSpPr/>
           <p:nvPr/>
         </p:nvSpPr>
@@ -5141,7 +5189,7 @@
       </p:sp>
       <p:sp>
         <p:nvSpPr>
-          <p:cNvPr id="7" name="TextBox 6"/>
+          <p:cNvPr id="8" name="TextBox 7"/>
           <p:cNvSpPr txBox="1"/>
           <p:nvPr/>
         </p:nvSpPr>
@@ -6478,7 +6526,7 @@
         <p:spPr>
           <a:xfrm>
             <a:off x="640080" y="1737360"/>
-            <a:ext cx="10881360" cy="4023360"/>
+            <a:ext cx="10881360" cy="2743200"/>
           </a:xfrm>
           <a:prstGeom prst="rect">
             <a:avLst/>
@@ -6496,7 +6544,7 @@
                 <a:spcPct val="125000"/>
               </a:lnSpc>
               <a:spcAft>
-                <a:spcPts val="1600"/>
+                <a:spcPts val="1400"/>
               </a:spcAft>
             </a:pPr>
             <a:r>
@@ -6515,7 +6563,7 @@
                 <a:spcPct val="125000"/>
               </a:lnSpc>
               <a:spcAft>
-                <a:spcPts val="1600"/>
+                <a:spcPts val="1400"/>
               </a:spcAft>
             </a:pPr>
             <a:r>
@@ -6534,26 +6582,7 @@
                 <a:spcPct val="125000"/>
               </a:lnSpc>
               <a:spcAft>
-                <a:spcPts val="1600"/>
-              </a:spcAft>
-            </a:pPr>
-            <a:r>
-              <a:rPr sz="1600">
-                <a:solidFill>
-                  <a:srgbClr val="19180F"/>
-                </a:solidFill>
-                <a:latin typeface="Calibri"/>
-              </a:rPr>
-              <a:t>  •  Next: recompute centrality using only mutually-confirmed ties (the 24–27% that go both ways) — testing directly whether weak, one-way "likes" are the reason we see no effect.</a:t>
-            </a:r>
-          </a:p>
-          <a:p>
-            <a:pPr>
-              <a:lnSpc>
-                <a:spcPct val="125000"/>
-              </a:lnSpc>
-              <a:spcAft>
-                <a:spcPts val="1600"/>
+                <a:spcPts val="1400"/>
               </a:spcAft>
             </a:pPr>
             <a:r>
@@ -6571,6 +6600,69 @@
       <p:sp>
         <p:nvSpPr>
           <p:cNvPr id="6" name="TextBox 5"/>
+          <p:cNvSpPr txBox="1"/>
+          <p:nvPr/>
+        </p:nvSpPr>
+        <p:spPr>
+          <a:xfrm>
+            <a:off x="640080" y="4343400"/>
+            <a:ext cx="10881360" cy="320040"/>
+          </a:xfrm>
+          <a:prstGeom prst="rect">
+            <a:avLst/>
+          </a:prstGeom>
+          <a:noFill/>
+        </p:spPr>
+        <p:txBody>
+          <a:bodyPr wrap="square" anchor="t">
+            <a:spAutoFit/>
+          </a:bodyPr>
+          <a:lstStyle/>
+          <a:p>
+            <a:pPr algn="l">
+              <a:lnSpc>
+                <a:spcPct val="118000"/>
+              </a:lnSpc>
+            </a:pPr>
+            <a:r>
+              <a:rPr sz="1300" b="0" i="1">
+                <a:solidFill>
+                  <a:srgbClr val="55503F"/>
+                </a:solidFill>
+                <a:latin typeface="Calibri"/>
+              </a:rPr>
+              <a:t>Next: recompute centrality using only mutually-confirmed ties, shown below.</a:t>
+            </a:r>
+          </a:p>
+        </p:txBody>
+      </p:sp>
+      <p:pic>
+        <p:nvPicPr>
+          <p:cNvPr id="7" name="Picture 6" descr="fig_p2_reciprocal_ties.png"/>
+          <p:cNvPicPr>
+            <a:picLocks noChangeAspect="1"/>
+          </p:cNvPicPr>
+          <p:nvPr/>
+        </p:nvPicPr>
+        <p:blipFill>
+          <a:blip r:embed="rId2"/>
+          <a:stretch>
+            <a:fillRect/>
+          </a:stretch>
+        </p:blipFill>
+        <p:spPr>
+          <a:xfrm>
+            <a:off x="3588391" y="4663440"/>
+            <a:ext cx="5014912" cy="1783080"/>
+          </a:xfrm>
+          <a:prstGeom prst="rect">
+            <a:avLst/>
+          </a:prstGeom>
+        </p:spPr>
+      </p:pic>
+      <p:sp>
+        <p:nvSpPr>
+          <p:cNvPr id="8" name="TextBox 7"/>
           <p:cNvSpPr txBox="1"/>
           <p:nvPr/>
         </p:nvSpPr>

--- a/slides/Presentation2.pptx
+++ b/slides/Presentation2.pptx
@@ -3816,7 +3816,7 @@
         <p:spPr>
           <a:xfrm>
             <a:off x="640080" y="1600200"/>
-            <a:ext cx="10881360" cy="822960"/>
+            <a:ext cx="10881360" cy="640080"/>
           </a:xfrm>
           <a:prstGeom prst="rect">
             <a:avLst/>
@@ -3841,7 +3841,7 @@
                 </a:solidFill>
                 <a:latin typeface="Calibri"/>
               </a:rPr>
-              <a:t>Does a student's position in a friendship network predict their grades, on top of popularity and who their direct friends are? The plan: measure Katz-Bonacich centrality, sweep it across φ, and test it against that question.</a:t>
+              <a:t>Does network position predict grades, beyond popularity and direct friends? Plan: Katz-Bonacich centrality, swept across φ.</a:t>
             </a:r>
           </a:p>
         </p:txBody>
@@ -3999,7 +3999,46 @@
       </p:sp>
       <p:sp>
         <p:nvSpPr>
-          <p:cNvPr id="9" name="Rounded Rectangle 8"/>
+          <p:cNvPr id="9" name="TextBox 8"/>
+          <p:cNvSpPr txBox="1"/>
+          <p:nvPr/>
+        </p:nvSpPr>
+        <p:spPr>
+          <a:xfrm>
+            <a:off x="3246120" y="2889504"/>
+            <a:ext cx="256032" cy="685800"/>
+          </a:xfrm>
+          <a:prstGeom prst="rect">
+            <a:avLst/>
+          </a:prstGeom>
+          <a:noFill/>
+        </p:spPr>
+        <p:txBody>
+          <a:bodyPr wrap="square" anchor="ctr">
+            <a:spAutoFit/>
+          </a:bodyPr>
+          <a:lstStyle/>
+          <a:p>
+            <a:pPr algn="ctr">
+              <a:lnSpc>
+                <a:spcPct val="118000"/>
+              </a:lnSpc>
+            </a:pPr>
+            <a:r>
+              <a:rPr sz="2000" b="1" i="0">
+                <a:solidFill>
+                  <a:srgbClr val="DDD8CD"/>
+                </a:solidFill>
+                <a:latin typeface="Calibri"/>
+              </a:rPr>
+              <a:t>→</a:t>
+            </a:r>
+          </a:p>
+        </p:txBody>
+      </p:sp>
+      <p:sp>
+        <p:nvSpPr>
+          <p:cNvPr id="10" name="Rounded Rectangle 9"/>
           <p:cNvSpPr/>
           <p:nvPr/>
         </p:nvSpPr>
@@ -4056,7 +4095,7 @@
       </p:sp>
       <p:sp>
         <p:nvSpPr>
-          <p:cNvPr id="10" name="TextBox 9"/>
+          <p:cNvPr id="11" name="TextBox 10"/>
           <p:cNvSpPr txBox="1"/>
           <p:nvPr/>
         </p:nvSpPr>
@@ -4095,7 +4134,7 @@
       </p:sp>
       <p:sp>
         <p:nvSpPr>
-          <p:cNvPr id="11" name="TextBox 10"/>
+          <p:cNvPr id="12" name="TextBox 11"/>
           <p:cNvSpPr txBox="1"/>
           <p:nvPr/>
         </p:nvSpPr>
@@ -4150,7 +4189,46 @@
       </p:sp>
       <p:sp>
         <p:nvSpPr>
-          <p:cNvPr id="12" name="Rounded Rectangle 11"/>
+          <p:cNvPr id="13" name="TextBox 12"/>
+          <p:cNvSpPr txBox="1"/>
+          <p:nvPr/>
+        </p:nvSpPr>
+        <p:spPr>
+          <a:xfrm>
+            <a:off x="6108192" y="2889504"/>
+            <a:ext cx="256032" cy="685800"/>
+          </a:xfrm>
+          <a:prstGeom prst="rect">
+            <a:avLst/>
+          </a:prstGeom>
+          <a:noFill/>
+        </p:spPr>
+        <p:txBody>
+          <a:bodyPr wrap="square" anchor="ctr">
+            <a:spAutoFit/>
+          </a:bodyPr>
+          <a:lstStyle/>
+          <a:p>
+            <a:pPr algn="ctr">
+              <a:lnSpc>
+                <a:spcPct val="118000"/>
+              </a:lnSpc>
+            </a:pPr>
+            <a:r>
+              <a:rPr sz="2000" b="1" i="0">
+                <a:solidFill>
+                  <a:srgbClr val="DDD8CD"/>
+                </a:solidFill>
+                <a:latin typeface="Calibri"/>
+              </a:rPr>
+              <a:t>→</a:t>
+            </a:r>
+          </a:p>
+        </p:txBody>
+      </p:sp>
+      <p:sp>
+        <p:nvSpPr>
+          <p:cNvPr id="14" name="Rounded Rectangle 13"/>
           <p:cNvSpPr/>
           <p:nvPr/>
         </p:nvSpPr>
@@ -4207,7 +4285,7 @@
       </p:sp>
       <p:sp>
         <p:nvSpPr>
-          <p:cNvPr id="13" name="TextBox 12"/>
+          <p:cNvPr id="15" name="TextBox 14"/>
           <p:cNvSpPr txBox="1"/>
           <p:nvPr/>
         </p:nvSpPr>
@@ -4246,7 +4324,7 @@
       </p:sp>
       <p:sp>
         <p:nvSpPr>
-          <p:cNvPr id="14" name="TextBox 13"/>
+          <p:cNvPr id="16" name="TextBox 15"/>
           <p:cNvSpPr txBox="1"/>
           <p:nvPr/>
         </p:nvSpPr>
@@ -4301,7 +4379,46 @@
       </p:sp>
       <p:sp>
         <p:nvSpPr>
-          <p:cNvPr id="15" name="Rounded Rectangle 14"/>
+          <p:cNvPr id="17" name="TextBox 16"/>
+          <p:cNvSpPr txBox="1"/>
+          <p:nvPr/>
+        </p:nvSpPr>
+        <p:spPr>
+          <a:xfrm>
+            <a:off x="8970264" y="2889504"/>
+            <a:ext cx="256032" cy="685800"/>
+          </a:xfrm>
+          <a:prstGeom prst="rect">
+            <a:avLst/>
+          </a:prstGeom>
+          <a:noFill/>
+        </p:spPr>
+        <p:txBody>
+          <a:bodyPr wrap="square" anchor="ctr">
+            <a:spAutoFit/>
+          </a:bodyPr>
+          <a:lstStyle/>
+          <a:p>
+            <a:pPr algn="ctr">
+              <a:lnSpc>
+                <a:spcPct val="118000"/>
+              </a:lnSpc>
+            </a:pPr>
+            <a:r>
+              <a:rPr sz="2000" b="1" i="0">
+                <a:solidFill>
+                  <a:srgbClr val="DDD8CD"/>
+                </a:solidFill>
+                <a:latin typeface="Calibri"/>
+              </a:rPr>
+              <a:t>→</a:t>
+            </a:r>
+          </a:p>
+        </p:txBody>
+      </p:sp>
+      <p:sp>
+        <p:nvSpPr>
+          <p:cNvPr id="18" name="Rounded Rectangle 17"/>
           <p:cNvSpPr/>
           <p:nvPr/>
         </p:nvSpPr>
@@ -4358,7 +4475,7 @@
       </p:sp>
       <p:sp>
         <p:nvSpPr>
-          <p:cNvPr id="16" name="TextBox 15"/>
+          <p:cNvPr id="19" name="TextBox 18"/>
           <p:cNvSpPr txBox="1"/>
           <p:nvPr/>
         </p:nvSpPr>
@@ -4397,7 +4514,7 @@
       </p:sp>
       <p:sp>
         <p:nvSpPr>
-          <p:cNvPr id="17" name="TextBox 16"/>
+          <p:cNvPr id="20" name="TextBox 19"/>
           <p:cNvSpPr txBox="1"/>
           <p:nvPr/>
         </p:nvSpPr>
@@ -4452,7 +4569,7 @@
       </p:sp>
       <p:sp>
         <p:nvSpPr>
-          <p:cNvPr id="18" name="Rounded Rectangle 17"/>
+          <p:cNvPr id="21" name="Rounded Rectangle 20"/>
           <p:cNvSpPr/>
           <p:nvPr/>
         </p:nvSpPr>
@@ -4509,7 +4626,7 @@
       </p:sp>
       <p:sp>
         <p:nvSpPr>
-          <p:cNvPr id="19" name="TextBox 18"/>
+          <p:cNvPr id="22" name="TextBox 21"/>
           <p:cNvSpPr txBox="1"/>
           <p:nvPr/>
         </p:nvSpPr>
@@ -4694,8 +4811,8 @@
         </p:nvSpPr>
         <p:spPr>
           <a:xfrm>
-            <a:off x="640080" y="1828800"/>
-            <a:ext cx="5212080" cy="3840480"/>
+            <a:off x="640080" y="1920240"/>
+            <a:ext cx="5212080" cy="3657600"/>
           </a:xfrm>
           <a:prstGeom prst="rect">
             <a:avLst/>
@@ -4710,58 +4827,85 @@
           <a:p>
             <a:pPr>
               <a:lnSpc>
-                <a:spcPct val="125000"/>
+                <a:spcPct val="120000"/>
               </a:lnSpc>
               <a:spcAft>
-                <a:spcPts val="1600"/>
+                <a:spcPts val="2000"/>
               </a:spcAft>
             </a:pPr>
             <a:r>
-              <a:rPr sz="1550">
+              <a:rPr sz="1500" b="1">
+                <a:solidFill>
+                  <a:srgbClr val="2E9E5B"/>
+                </a:solidFill>
+                <a:latin typeface="Calibri"/>
+              </a:rPr>
+              <a:t>  •  0.955   </a:t>
+            </a:r>
+            <a:r>
+              <a:rPr sz="1400">
                 <a:solidFill>
                   <a:srgbClr val="19180F"/>
                 </a:solidFill>
                 <a:latin typeface="Calibri"/>
               </a:rPr>
-              <a:t>  •  A student's own past GPA strongly predicts their next GPA (coefficient 0.955).</a:t>
+              <a:t>own past GPA strongly predicts next GPA</a:t>
             </a:r>
           </a:p>
           <a:p>
             <a:pPr>
               <a:lnSpc>
-                <a:spcPct val="125000"/>
+                <a:spcPct val="120000"/>
               </a:lnSpc>
               <a:spcAft>
-                <a:spcPts val="1600"/>
+                <a:spcPts val="2000"/>
               </a:spcAft>
             </a:pPr>
             <a:r>
-              <a:rPr sz="1550">
+              <a:rPr sz="1500" b="1">
+                <a:solidFill>
+                  <a:srgbClr val="55503F"/>
+                </a:solidFill>
+                <a:latin typeface="Calibri"/>
+              </a:rPr>
+              <a:t>  •  p = 0.557   </a:t>
+            </a:r>
+            <a:r>
+              <a:rPr sz="1400">
                 <a:solidFill>
                   <a:srgbClr val="19180F"/>
                 </a:solidFill>
                 <a:latin typeface="Calibri"/>
               </a:rPr>
-              <a:t>  •  Once that's controlled, a friend's past GPA does not predict your future GPA — not significant (p = 0.557).</a:t>
+              <a:t>friend's past GPA — no effect</a:t>
             </a:r>
           </a:p>
           <a:p>
             <a:pPr>
               <a:lnSpc>
-                <a:spcPct val="125000"/>
+                <a:spcPct val="120000"/>
               </a:lnSpc>
               <a:spcAft>
-                <a:spcPts val="1600"/>
+                <a:spcPts val="2000"/>
               </a:spcAft>
             </a:pPr>
             <a:r>
-              <a:rPr sz="1550">
+              <a:rPr sz="1500" b="1">
                 <a:solidFill>
                   <a:srgbClr val="19180F"/>
                 </a:solidFill>
                 <a:latin typeface="Calibri"/>
               </a:rPr>
-              <a:t>  •  New friendships show a smaller GPA gap than friendships about to end, in the university sample (p &lt; 0.001); same direction in high school, not significant.</a:t>
+              <a:t>  •  p &lt; 0.001   </a:t>
+            </a:r>
+            <a:r>
+              <a:rPr sz="1400">
+                <a:solidFill>
+                  <a:srgbClr val="19180F"/>
+                </a:solidFill>
+                <a:latin typeface="Calibri"/>
+              </a:rPr>
+              <a:t>new friends more similar than friends about to leave (university; not sig. in school)</a:t>
             </a:r>
           </a:p>
         </p:txBody>
@@ -5034,8 +5178,8 @@
         </p:nvSpPr>
         <p:spPr>
           <a:xfrm>
-            <a:off x="640080" y="1874519"/>
-            <a:ext cx="5212080" cy="3566160"/>
+            <a:off x="640080" y="1920240"/>
+            <a:ext cx="5212080" cy="3657600"/>
           </a:xfrm>
           <a:prstGeom prst="rect">
             <a:avLst/>
@@ -5050,58 +5194,85 @@
           <a:p>
             <a:pPr>
               <a:lnSpc>
-                <a:spcPct val="125000"/>
+                <a:spcPct val="120000"/>
               </a:lnSpc>
               <a:spcAft>
-                <a:spcPts val="1800"/>
+                <a:spcPts val="2000"/>
               </a:spcAft>
             </a:pPr>
             <a:r>
-              <a:rPr sz="1550">
+              <a:rPr sz="1500" b="1">
+                <a:solidFill>
+                  <a:srgbClr val="2E9E5B"/>
+                </a:solidFill>
+                <a:latin typeface="Calibri"/>
+              </a:rPr>
+              <a:t>  •  +0.093   </a:t>
+            </a:r>
+            <a:r>
+              <a:rPr sz="1400">
                 <a:solidFill>
                   <a:srgbClr val="19180F"/>
                 </a:solidFill>
                 <a:latin typeface="Calibri"/>
               </a:rPr>
-              <a:t>  •  Katz-Bonacich alone, net of friend GPA: coefficient +0.093, p &lt; 0.001. Looks like position matters.</a:t>
+              <a:t>Katz alone — looks like position matters</a:t>
             </a:r>
           </a:p>
           <a:p>
             <a:pPr>
               <a:lnSpc>
-                <a:spcPct val="125000"/>
+                <a:spcPct val="120000"/>
               </a:lnSpc>
               <a:spcAft>
-                <a:spcPts val="1800"/>
+                <a:spcPts val="2000"/>
               </a:spcAft>
             </a:pPr>
             <a:r>
-              <a:rPr sz="1550">
+              <a:rPr sz="1500" b="1">
+                <a:solidFill>
+                  <a:srgbClr val="55503F"/>
+                </a:solidFill>
+                <a:latin typeface="Calibri"/>
+              </a:rPr>
+              <a:t>  •  −0.028   </a:t>
+            </a:r>
+            <a:r>
+              <a:rPr sz="1400">
                 <a:solidFill>
                   <a:srgbClr val="19180F"/>
                 </a:solidFill>
                 <a:latin typeface="Calibri"/>
               </a:rPr>
-              <a:t>  •  Add raw in-degree and out-degree to the same regression: the coefficient drops to −0.028, p = 0.446 — no longer significant.</a:t>
+              <a:t>add degree control — no longer significant</a:t>
             </a:r>
           </a:p>
           <a:p>
             <a:pPr>
               <a:lnSpc>
-                <a:spcPct val="125000"/>
+                <a:spcPct val="120000"/>
               </a:lnSpc>
               <a:spcAft>
-                <a:spcPts val="1800"/>
+                <a:spcPts val="2000"/>
               </a:spcAft>
             </a:pPr>
             <a:r>
-              <a:rPr sz="1550">
+              <a:rPr sz="1500" b="1">
+                <a:solidFill>
+                  <a:srgbClr val="2E9E5B"/>
+                </a:solidFill>
+                <a:latin typeface="Calibri"/>
+              </a:rPr>
+              <a:t>  •  +0.153   </a:t>
+            </a:r>
+            <a:r>
+              <a:rPr sz="1400">
                 <a:solidFill>
                   <a:srgbClr val="19180F"/>
                 </a:solidFill>
                 <a:latin typeface="Calibri"/>
               </a:rPr>
-              <a:t>  •  In-degree itself: +0.153, p &lt; 0.001. That's what was driving the naive result.</a:t>
+              <a:t>in-degree alone — this was driving it</a:t>
             </a:r>
           </a:p>
         </p:txBody>
@@ -5398,8 +5569,8 @@
         </p:nvSpPr>
         <p:spPr>
           <a:xfrm>
-            <a:off x="640080" y="5806440"/>
-            <a:ext cx="10881360" cy="777240"/>
+            <a:off x="640080" y="5943600"/>
+            <a:ext cx="10881360" cy="594360"/>
           </a:xfrm>
           <a:prstGeom prst="roundRect">
             <a:avLst>
@@ -5442,7 +5613,7 @@
                 </a:solidFill>
                 <a:latin typeface="Calibri"/>
               </a:rPr>
-              <a:t>Own past GPA can only be built for the school group — the other 80% of the pooled sample can't have it.</a:t>
+              <a:t>Own past GPA only exists for the school group — 80% of the pooled sample can't have it.</a:t>
             </a:r>
           </a:p>
         </p:txBody>
@@ -6260,14 +6431,71 @@
       </p:sp>
       <p:sp>
         <p:nvSpPr>
-          <p:cNvPr id="7" name="TextBox 6"/>
+          <p:cNvPr id="7" name="Rounded Rectangle 6"/>
+          <p:cNvSpPr/>
+          <p:nvPr/>
+        </p:nvSpPr>
+        <p:spPr>
+          <a:xfrm>
+            <a:off x="640080" y="3246120"/>
+            <a:ext cx="3429000" cy="594360"/>
+          </a:xfrm>
+          <a:prstGeom prst="roundRect">
+            <a:avLst>
+              <a:gd name="adj" fmla="val 8000"/>
+            </a:avLst>
+          </a:prstGeom>
+          <a:solidFill>
+            <a:srgbClr val="2E9E5B"/>
+          </a:solidFill>
+          <a:ln w="17780">
+            <a:solidFill>
+              <a:srgbClr val="DDD8CD"/>
+            </a:solidFill>
+          </a:ln>
+          <a:effectLst/>
+        </p:spPr>
+        <p:style>
+          <a:lnRef idx="1">
+            <a:schemeClr val="accent1"/>
+          </a:lnRef>
+          <a:fillRef idx="3">
+            <a:schemeClr val="accent1"/>
+          </a:fillRef>
+          <a:effectRef idx="2">
+            <a:schemeClr val="accent1"/>
+          </a:effectRef>
+          <a:fontRef idx="minor">
+            <a:schemeClr val="lt1"/>
+          </a:fontRef>
+        </p:style>
+        <p:txBody>
+          <a:bodyPr rtlCol="0" anchor="ctr" wrap="square" lIns="109728" rIns="109728"/>
+          <a:lstStyle/>
+          <a:p>
+            <a:pPr algn="ctr"/>
+            <a:r>
+              <a:rPr sz="1700" b="1">
+                <a:solidFill>
+                  <a:srgbClr val="FFFFFF"/>
+                </a:solidFill>
+                <a:latin typeface="Calibri"/>
+              </a:rPr>
+              <a:t>1st</a:t>
+            </a:r>
+          </a:p>
+        </p:txBody>
+      </p:sp>
+      <p:sp>
+        <p:nvSpPr>
+          <p:cNvPr id="8" name="TextBox 7"/>
           <p:cNvSpPr txBox="1"/>
           <p:nvPr/>
         </p:nvSpPr>
         <p:spPr>
           <a:xfrm>
-            <a:off x="640080" y="3154680"/>
-            <a:ext cx="10881360" cy="3017520"/>
+            <a:off x="640080" y="3977639"/>
+            <a:ext cx="3429000" cy="365760"/>
           </a:xfrm>
           <a:prstGeom prst="rect">
             <a:avLst/>
@@ -6275,72 +6503,340 @@
           <a:noFill/>
         </p:spPr>
         <p:txBody>
-          <a:bodyPr wrap="square">
+          <a:bodyPr wrap="square" anchor="t">
             <a:spAutoFit/>
           </a:bodyPr>
           <a:lstStyle/>
           <a:p>
-            <a:pPr>
+            <a:pPr algn="ctr">
+              <a:lnSpc>
+                <a:spcPct val="118000"/>
+              </a:lnSpc>
+            </a:pPr>
+            <a:r>
+              <a:rPr sz="1500" b="1" i="0">
+                <a:solidFill>
+                  <a:srgbClr val="19180F"/>
+                </a:solidFill>
+                <a:latin typeface="Calibri"/>
+              </a:rPr>
+              <a:t>First real test</a:t>
+            </a:r>
+          </a:p>
+        </p:txBody>
+      </p:sp>
+      <p:sp>
+        <p:nvSpPr>
+          <p:cNvPr id="9" name="TextBox 8"/>
+          <p:cNvSpPr txBox="1"/>
+          <p:nvPr/>
+        </p:nvSpPr>
+        <p:spPr>
+          <a:xfrm>
+            <a:off x="640080" y="4389120"/>
+            <a:ext cx="3429000" cy="1463040"/>
+          </a:xfrm>
+          <a:prstGeom prst="rect">
+            <a:avLst/>
+          </a:prstGeom>
+          <a:noFill/>
+        </p:spPr>
+        <p:txBody>
+          <a:bodyPr wrap="square" anchor="t">
+            <a:spAutoFit/>
+          </a:bodyPr>
+          <a:lstStyle/>
+          <a:p>
+            <a:pPr algn="ctr">
               <a:lnSpc>
                 <a:spcPct val="125000"/>
               </a:lnSpc>
-              <a:spcAft>
-                <a:spcPts val="1400"/>
-              </a:spcAft>
             </a:pPr>
             <a:r>
-              <a:rPr sz="1550">
+              <a:rPr sz="1250" b="0" i="0">
+                <a:solidFill>
+                  <a:srgbClr val="55503F"/>
+                </a:solidFill>
+                <a:latin typeface="Calibri"/>
+              </a:rPr>
+              <a:t>Time lag + own-performance control — a cross-section couldn't support this.</a:t>
+            </a:r>
+          </a:p>
+        </p:txBody>
+      </p:sp>
+      <p:sp>
+        <p:nvSpPr>
+          <p:cNvPr id="10" name="Rounded Rectangle 9"/>
+          <p:cNvSpPr/>
+          <p:nvPr/>
+        </p:nvSpPr>
+        <p:spPr>
+          <a:xfrm>
+            <a:off x="4389120" y="3246120"/>
+            <a:ext cx="3429000" cy="594360"/>
+          </a:xfrm>
+          <a:prstGeom prst="roundRect">
+            <a:avLst>
+              <a:gd name="adj" fmla="val 8000"/>
+            </a:avLst>
+          </a:prstGeom>
+          <a:solidFill>
+            <a:srgbClr val="2E9E5B"/>
+          </a:solidFill>
+          <a:ln w="17780">
+            <a:solidFill>
+              <a:srgbClr val="DDD8CD"/>
+            </a:solidFill>
+          </a:ln>
+          <a:effectLst/>
+        </p:spPr>
+        <p:style>
+          <a:lnRef idx="1">
+            <a:schemeClr val="accent1"/>
+          </a:lnRef>
+          <a:fillRef idx="3">
+            <a:schemeClr val="accent1"/>
+          </a:fillRef>
+          <a:effectRef idx="2">
+            <a:schemeClr val="accent1"/>
+          </a:effectRef>
+          <a:fontRef idx="minor">
+            <a:schemeClr val="lt1"/>
+          </a:fontRef>
+        </p:style>
+        <p:txBody>
+          <a:bodyPr rtlCol="0" anchor="ctr" wrap="square" lIns="109728" rIns="109728"/>
+          <a:lstStyle/>
+          <a:p>
+            <a:pPr algn="ctr"/>
+            <a:r>
+              <a:rPr sz="1700" b="1">
+                <a:solidFill>
+                  <a:srgbClr val="FFFFFF"/>
+                </a:solidFill>
+                <a:latin typeface="Calibri"/>
+              </a:rPr>
+              <a:t>!</a:t>
+            </a:r>
+          </a:p>
+        </p:txBody>
+      </p:sp>
+      <p:sp>
+        <p:nvSpPr>
+          <p:cNvPr id="11" name="TextBox 10"/>
+          <p:cNvSpPr txBox="1"/>
+          <p:nvPr/>
+        </p:nvSpPr>
+        <p:spPr>
+          <a:xfrm>
+            <a:off x="4389120" y="3977639"/>
+            <a:ext cx="3429000" cy="365760"/>
+          </a:xfrm>
+          <a:prstGeom prst="rect">
+            <a:avLst/>
+          </a:prstGeom>
+          <a:noFill/>
+        </p:spPr>
+        <p:txBody>
+          <a:bodyPr wrap="square" anchor="t">
+            <a:spAutoFit/>
+          </a:bodyPr>
+          <a:lstStyle/>
+          <a:p>
+            <a:pPr algn="ctr">
+              <a:lnSpc>
+                <a:spcPct val="118000"/>
+              </a:lnSpc>
+            </a:pPr>
+            <a:r>
+              <a:rPr sz="1500" b="1" i="0">
                 <a:solidFill>
                   <a:srgbClr val="19180F"/>
                 </a:solidFill>
                 <a:latin typeface="Calibri"/>
               </a:rPr>
-              <a:t>  •  This is the first time this claim has been tested with a real time lag and an own-performance control — a cross-section could never support that.</a:t>
-            </a:r>
-          </a:p>
-          <a:p>
-            <a:pPr>
+              <a:t>A general risk</a:t>
+            </a:r>
+          </a:p>
+        </p:txBody>
+      </p:sp>
+      <p:sp>
+        <p:nvSpPr>
+          <p:cNvPr id="12" name="TextBox 11"/>
+          <p:cNvSpPr txBox="1"/>
+          <p:nvPr/>
+        </p:nvSpPr>
+        <p:spPr>
+          <a:xfrm>
+            <a:off x="4389120" y="4389120"/>
+            <a:ext cx="3429000" cy="1463040"/>
+          </a:xfrm>
+          <a:prstGeom prst="rect">
+            <a:avLst/>
+          </a:prstGeom>
+          <a:noFill/>
+        </p:spPr>
+        <p:txBody>
+          <a:bodyPr wrap="square" anchor="t">
+            <a:spAutoFit/>
+          </a:bodyPr>
+          <a:lstStyle/>
+          <a:p>
+            <a:pPr algn="ctr">
               <a:lnSpc>
                 <a:spcPct val="125000"/>
               </a:lnSpc>
-              <a:spcAft>
-                <a:spcPts val="1400"/>
-              </a:spcAft>
             </a:pPr>
             <a:r>
-              <a:rPr sz="1550">
+              <a:rPr sz="1250" b="0" i="0">
+                <a:solidFill>
+                  <a:srgbClr val="55503F"/>
+                </a:solidFill>
+                <a:latin typeface="Calibri"/>
+              </a:rPr>
+              <a:t>Pooling mismatched data structures can manufacture a false-positive coefficient.</a:t>
+            </a:r>
+          </a:p>
+        </p:txBody>
+      </p:sp>
+      <p:sp>
+        <p:nvSpPr>
+          <p:cNvPr id="13" name="Rounded Rectangle 12"/>
+          <p:cNvSpPr/>
+          <p:nvPr/>
+        </p:nvSpPr>
+        <p:spPr>
+          <a:xfrm>
+            <a:off x="8138159" y="3246120"/>
+            <a:ext cx="3429000" cy="594360"/>
+          </a:xfrm>
+          <a:prstGeom prst="roundRect">
+            <a:avLst>
+              <a:gd name="adj" fmla="val 8000"/>
+            </a:avLst>
+          </a:prstGeom>
+          <a:solidFill>
+            <a:srgbClr val="2E9E5B"/>
+          </a:solidFill>
+          <a:ln w="17780">
+            <a:solidFill>
+              <a:srgbClr val="DDD8CD"/>
+            </a:solidFill>
+          </a:ln>
+          <a:effectLst/>
+        </p:spPr>
+        <p:style>
+          <a:lnRef idx="1">
+            <a:schemeClr val="accent1"/>
+          </a:lnRef>
+          <a:fillRef idx="3">
+            <a:schemeClr val="accent1"/>
+          </a:fillRef>
+          <a:effectRef idx="2">
+            <a:schemeClr val="accent1"/>
+          </a:effectRef>
+          <a:fontRef idx="minor">
+            <a:schemeClr val="lt1"/>
+          </a:fontRef>
+        </p:style>
+        <p:txBody>
+          <a:bodyPr rtlCol="0" anchor="ctr" wrap="square" lIns="109728" rIns="109728"/>
+          <a:lstStyle/>
+          <a:p>
+            <a:pPr algn="ctr"/>
+            <a:r>
+              <a:rPr sz="1700" b="1">
+                <a:solidFill>
+                  <a:srgbClr val="FFFFFF"/>
+                </a:solidFill>
+                <a:latin typeface="Calibri"/>
+              </a:rPr>
+              <a:t>→</a:t>
+            </a:r>
+          </a:p>
+        </p:txBody>
+      </p:sp>
+      <p:sp>
+        <p:nvSpPr>
+          <p:cNvPr id="14" name="TextBox 13"/>
+          <p:cNvSpPr txBox="1"/>
+          <p:nvPr/>
+        </p:nvSpPr>
+        <p:spPr>
+          <a:xfrm>
+            <a:off x="8138159" y="3977639"/>
+            <a:ext cx="3429000" cy="365760"/>
+          </a:xfrm>
+          <a:prstGeom prst="rect">
+            <a:avLst/>
+          </a:prstGeom>
+          <a:noFill/>
+        </p:spPr>
+        <p:txBody>
+          <a:bodyPr wrap="square" anchor="t">
+            <a:spAutoFit/>
+          </a:bodyPr>
+          <a:lstStyle/>
+          <a:p>
+            <a:pPr algn="ctr">
+              <a:lnSpc>
+                <a:spcPct val="118000"/>
+              </a:lnSpc>
+            </a:pPr>
+            <a:r>
+              <a:rPr sz="1500" b="1" i="0">
                 <a:solidFill>
                   <a:srgbClr val="19180F"/>
                 </a:solidFill>
                 <a:latin typeface="Calibri"/>
               </a:rPr>
-              <a:t>  •  It shows a general risk: pooling groups with different data structures can manufacture a significant coefficient the correctly specified subsample doesn't support.</a:t>
-            </a:r>
-          </a:p>
-          <a:p>
-            <a:pPr>
+              <a:t>Decision-relevant</a:t>
+            </a:r>
+          </a:p>
+        </p:txBody>
+      </p:sp>
+      <p:sp>
+        <p:nvSpPr>
+          <p:cNvPr id="15" name="TextBox 14"/>
+          <p:cNvSpPr txBox="1"/>
+          <p:nvPr/>
+        </p:nvSpPr>
+        <p:spPr>
+          <a:xfrm>
+            <a:off x="8138159" y="4389120"/>
+            <a:ext cx="3429000" cy="1463040"/>
+          </a:xfrm>
+          <a:prstGeom prst="rect">
+            <a:avLst/>
+          </a:prstGeom>
+          <a:noFill/>
+        </p:spPr>
+        <p:txBody>
+          <a:bodyPr wrap="square" anchor="t">
+            <a:spAutoFit/>
+          </a:bodyPr>
+          <a:lstStyle/>
+          <a:p>
+            <a:pPr algn="ctr">
               <a:lnSpc>
                 <a:spcPct val="125000"/>
               </a:lnSpc>
-              <a:spcAft>
-                <a:spcPts val="1400"/>
-              </a:spcAft>
             </a:pPr>
             <a:r>
-              <a:rPr sz="1550">
-                <a:solidFill>
-                  <a:srgbClr val="19180F"/>
-                </a:solidFill>
-                <a:latin typeface="Calibri"/>
-              </a:rPr>
-              <a:t>  •  It's a decision-relevant answer: interventions built around widening students' network reach aren't supported by this data once the obvious confounds are handled.</a:t>
-            </a:r>
-          </a:p>
-        </p:txBody>
-      </p:sp>
-      <p:sp>
-        <p:nvSpPr>
-          <p:cNvPr id="8" name="TextBox 7"/>
+              <a:rPr sz="1250" b="0" i="0">
+                <a:solidFill>
+                  <a:srgbClr val="55503F"/>
+                </a:solidFill>
+                <a:latin typeface="Calibri"/>
+              </a:rPr>
+              <a:t>Network-reach interventions aren't supported once confounds are controlled.</a:t>
+            </a:r>
+          </a:p>
+        </p:txBody>
+      </p:sp>
+      <p:sp>
+        <p:nvSpPr>
+          <p:cNvPr id="16" name="TextBox 15"/>
           <p:cNvSpPr txBox="1"/>
           <p:nvPr/>
         </p:nvSpPr>
@@ -6525,8 +7021,8 @@
         </p:nvSpPr>
         <p:spPr>
           <a:xfrm>
-            <a:off x="640080" y="1737360"/>
-            <a:ext cx="10881360" cy="2743200"/>
+            <a:off x="640080" y="1783080"/>
+            <a:ext cx="10881360" cy="2377440"/>
           </a:xfrm>
           <a:prstGeom prst="rect">
             <a:avLst/>
@@ -6541,58 +7037,85 @@
           <a:p>
             <a:pPr>
               <a:lnSpc>
-                <a:spcPct val="125000"/>
+                <a:spcPct val="120000"/>
               </a:lnSpc>
               <a:spcAft>
                 <a:spcPts val="1400"/>
               </a:spcAft>
             </a:pPr>
             <a:r>
-              <a:rPr sz="1600">
+              <a:rPr sz="1600" b="1">
                 <a:solidFill>
                   <a:srgbClr val="19180F"/>
                 </a:solidFill>
                 <a:latin typeface="Calibri"/>
               </a:rPr>
-              <a:t>  •  The corrected test has n = 2,088 from 535 students — a much wider confidence interval than the pooled test's 36,696.</a:t>
+              <a:t>  •  n = 2,088   </a:t>
+            </a:r>
+            <a:r>
+              <a:rPr sz="1500">
+                <a:solidFill>
+                  <a:srgbClr val="19180F"/>
+                </a:solidFill>
+                <a:latin typeface="Calibri"/>
+              </a:rPr>
+              <a:t>535 students — a much wider CI than the pooled 36,696</a:t>
             </a:r>
           </a:p>
           <a:p>
             <a:pPr>
               <a:lnSpc>
-                <a:spcPct val="125000"/>
+                <a:spcPct val="120000"/>
               </a:lnSpc>
               <a:spcAft>
                 <a:spcPts val="1400"/>
               </a:spcAft>
             </a:pPr>
             <a:r>
-              <a:rPr sz="1600">
+              <a:rPr sz="1600" b="1">
+                <a:solidFill>
+                  <a:srgbClr val="55503F"/>
+                </a:solidFill>
+                <a:latin typeface="Calibri"/>
+              </a:rPr>
+              <a:t>  •  static GPA   </a:t>
+            </a:r>
+            <a:r>
+              <a:rPr sz="1500">
                 <a:solidFill>
                   <a:srgbClr val="19180F"/>
                 </a:solidFill>
                 <a:latin typeface="Calibri"/>
               </a:rPr>
-              <a:t>  •  It can't be extended to the university cohorts: their GPA is a single measurement, not a time series.</a:t>
+              <a:t>can't extend to university cohorts — no time series there</a:t>
             </a:r>
           </a:p>
           <a:p>
             <a:pPr>
               <a:lnSpc>
-                <a:spcPct val="125000"/>
+                <a:spcPct val="120000"/>
               </a:lnSpc>
               <a:spcAft>
                 <a:spcPts val="1400"/>
               </a:spcAft>
             </a:pPr>
             <a:r>
-              <a:rPr sz="1600">
+              <a:rPr sz="1600" b="1">
+                <a:solidFill>
+                  <a:srgbClr val="55503F"/>
+                </a:solidFill>
+                <a:latin typeface="Calibri"/>
+              </a:rPr>
+              <a:t>  •  not yet run   </a:t>
+            </a:r>
+            <a:r>
+              <a:rPr sz="1500">
                 <a:solidFill>
                   <a:srgbClr val="19180F"/>
                 </a:solidFill>
                 <a:latin typeface="Calibri"/>
               </a:rPr>
-              <a:t>  •  Betweenness and eigenvector centrality still need to go through the corrected, school-only design.</a:t>
+              <a:t>betweenness / eigenvector centrality under the corrected design</a:t>
             </a:r>
           </a:p>
         </p:txBody>

--- a/slides/Presentation2.pptx
+++ b/slides/Presentation2.pptx
@@ -4619,7 +4619,7 @@
                 </a:solidFill>
                 <a:latin typeface="Calibri"/>
               </a:rPr>
-              <a:t>This brief reports what running that plan actually found.</a:t>
+              <a:t>Here's what actually happened when we ran it.</a:t>
             </a:r>
           </a:p>
         </p:txBody>

--- a/slides/Presentation2.pptx
+++ b/slides/Presentation2.pptx
@@ -5,18 +5,18 @@
     <p:sldMasterId id="2147483648" r:id="rId1"/>
   </p:sldMasterIdLst>
   <p:sldIdLst>
-    <p:sldId id="256" r:id="rId7"/>
-    <p:sldId id="257" r:id="rId8"/>
-    <p:sldId id="258" r:id="rId9"/>
-    <p:sldId id="259" r:id="rId10"/>
-    <p:sldId id="260" r:id="rId11"/>
-    <p:sldId id="261" r:id="rId12"/>
-    <p:sldId id="262" r:id="rId13"/>
-    <p:sldId id="263" r:id="rId14"/>
-    <p:sldId id="264" r:id="rId15"/>
-    <p:sldId id="265" r:id="rId16"/>
+    <p:sldId id="256" r:id="rId2"/>
+    <p:sldId id="257" r:id="rId3"/>
+    <p:sldId id="258" r:id="rId4"/>
+    <p:sldId id="259" r:id="rId5"/>
+    <p:sldId id="260" r:id="rId6"/>
+    <p:sldId id="261" r:id="rId7"/>
+    <p:sldId id="262" r:id="rId8"/>
+    <p:sldId id="263" r:id="rId9"/>
+    <p:sldId id="264" r:id="rId10"/>
+    <p:sldId id="265" r:id="rId11"/>
   </p:sldIdLst>
-  <p:sldSz cx="12191695" cy="6858000" type="screen4x3"/>
+  <p:sldSz cx="12192000" cy="6858000"/>
   <p:notesSz cx="6858000" cy="9144000"/>
   <p:defaultTextStyle>
     <a:defPPr>
@@ -113,6 +113,22 @@
       </a:defRPr>
     </a:lvl9pPr>
   </p:defaultTextStyle>
+  <p:extLst>
+    <p:ext uri="{EFAFB233-063F-42B5-8137-9DF3F51BA10A}">
+      <p15:sldGuideLst xmlns:p15="http://schemas.microsoft.com/office/powerpoint/2012/main">
+        <p15:guide id="1" orient="horz" pos="2160">
+          <p15:clr>
+            <a:srgbClr val="A4A3A4"/>
+          </p15:clr>
+        </p15:guide>
+        <p15:guide id="2" pos="2880">
+          <p15:clr>
+            <a:srgbClr val="A4A3A4"/>
+          </p15:clr>
+        </p15:guide>
+      </p15:sldGuideLst>
+    </p:ext>
+  </p:extLst>
 </p:presentation>
 </file>
 
@@ -154,10 +170,9 @@
           <a:lstStyle/>
           <a:p>
             <a:r>
-              <a:rPr lang="en-US" smtClean="0"/>
+              <a:rPr lang="en-US"/>
               <a:t>Click to edit Master title style</a:t>
             </a:r>
-            <a:endParaRPr lang="en-US"/>
           </a:p>
         </p:txBody>
       </p:sp>
@@ -273,10 +288,9 @@
           </a:lstStyle>
           <a:p>
             <a:r>
-              <a:rPr lang="en-US" smtClean="0"/>
+              <a:rPr lang="en-US"/>
               <a:t>Click to edit Master subtitle style</a:t>
             </a:r>
-            <a:endParaRPr lang="en-US"/>
           </a:p>
         </p:txBody>
       </p:sp>
@@ -297,7 +311,7 @@
           <a:p>
             <a:fld id="{5BCAD085-E8A6-8845-BD4E-CB4CCA059FC4}" type="datetimeFigureOut">
               <a:rPr lang="en-US" smtClean="0"/>
-              <a:t>1/27/13</a:t>
+              <a:t>9/23/26</a:t>
             </a:fld>
             <a:endParaRPr lang="en-US"/>
           </a:p>
@@ -391,10 +405,9 @@
           <a:lstStyle/>
           <a:p>
             <a:r>
-              <a:rPr lang="en-US" smtClean="0"/>
+              <a:rPr lang="en-US"/>
               <a:t>Click to edit Master title style</a:t>
             </a:r>
-            <a:endParaRPr lang="en-US"/>
           </a:p>
         </p:txBody>
       </p:sp>
@@ -415,38 +428,37 @@
           <a:p>
             <a:pPr lvl="0"/>
             <a:r>
-              <a:rPr lang="en-US" smtClean="0"/>
+              <a:rPr lang="en-US"/>
               <a:t>Click to edit Master text styles</a:t>
             </a:r>
           </a:p>
           <a:p>
             <a:pPr lvl="1"/>
             <a:r>
-              <a:rPr lang="en-US" smtClean="0"/>
+              <a:rPr lang="en-US"/>
               <a:t>Second level</a:t>
             </a:r>
           </a:p>
           <a:p>
             <a:pPr lvl="2"/>
             <a:r>
-              <a:rPr lang="en-US" smtClean="0"/>
+              <a:rPr lang="en-US"/>
               <a:t>Third level</a:t>
             </a:r>
           </a:p>
           <a:p>
             <a:pPr lvl="3"/>
             <a:r>
-              <a:rPr lang="en-US" smtClean="0"/>
+              <a:rPr lang="en-US"/>
               <a:t>Fourth level</a:t>
             </a:r>
           </a:p>
           <a:p>
             <a:pPr lvl="4"/>
             <a:r>
-              <a:rPr lang="en-US" smtClean="0"/>
+              <a:rPr lang="en-US"/>
               <a:t>Fifth level</a:t>
             </a:r>
-            <a:endParaRPr lang="en-US"/>
           </a:p>
         </p:txBody>
       </p:sp>
@@ -467,7 +479,7 @@
           <a:p>
             <a:fld id="{5BCAD085-E8A6-8845-BD4E-CB4CCA059FC4}" type="datetimeFigureOut">
               <a:rPr lang="en-US" smtClean="0"/>
-              <a:t>1/27/13</a:t>
+              <a:t>9/23/26</a:t>
             </a:fld>
             <a:endParaRPr lang="en-US"/>
           </a:p>
@@ -566,10 +578,9 @@
           <a:lstStyle/>
           <a:p>
             <a:r>
-              <a:rPr lang="en-US" smtClean="0"/>
+              <a:rPr lang="en-US"/>
               <a:t>Click to edit Master title style</a:t>
             </a:r>
-            <a:endParaRPr lang="en-US"/>
           </a:p>
         </p:txBody>
       </p:sp>
@@ -595,38 +606,37 @@
           <a:p>
             <a:pPr lvl="0"/>
             <a:r>
-              <a:rPr lang="en-US" smtClean="0"/>
+              <a:rPr lang="en-US"/>
               <a:t>Click to edit Master text styles</a:t>
             </a:r>
           </a:p>
           <a:p>
             <a:pPr lvl="1"/>
             <a:r>
-              <a:rPr lang="en-US" smtClean="0"/>
+              <a:rPr lang="en-US"/>
               <a:t>Second level</a:t>
             </a:r>
           </a:p>
           <a:p>
             <a:pPr lvl="2"/>
             <a:r>
-              <a:rPr lang="en-US" smtClean="0"/>
+              <a:rPr lang="en-US"/>
               <a:t>Third level</a:t>
             </a:r>
           </a:p>
           <a:p>
             <a:pPr lvl="3"/>
             <a:r>
-              <a:rPr lang="en-US" smtClean="0"/>
+              <a:rPr lang="en-US"/>
               <a:t>Fourth level</a:t>
             </a:r>
           </a:p>
           <a:p>
             <a:pPr lvl="4"/>
             <a:r>
-              <a:rPr lang="en-US" smtClean="0"/>
+              <a:rPr lang="en-US"/>
               <a:t>Fifth level</a:t>
             </a:r>
-            <a:endParaRPr lang="en-US"/>
           </a:p>
         </p:txBody>
       </p:sp>
@@ -647,7 +657,7 @@
           <a:p>
             <a:fld id="{5BCAD085-E8A6-8845-BD4E-CB4CCA059FC4}" type="datetimeFigureOut">
               <a:rPr lang="en-US" smtClean="0"/>
-              <a:t>1/27/13</a:t>
+              <a:t>9/23/26</a:t>
             </a:fld>
             <a:endParaRPr lang="en-US"/>
           </a:p>
@@ -741,10 +751,9 @@
           <a:lstStyle/>
           <a:p>
             <a:r>
-              <a:rPr lang="en-US" smtClean="0"/>
+              <a:rPr lang="en-US"/>
               <a:t>Click to edit Master title style</a:t>
             </a:r>
-            <a:endParaRPr lang="en-US"/>
           </a:p>
         </p:txBody>
       </p:sp>
@@ -765,38 +774,37 @@
           <a:p>
             <a:pPr lvl="0"/>
             <a:r>
-              <a:rPr lang="en-US" smtClean="0"/>
+              <a:rPr lang="en-US"/>
               <a:t>Click to edit Master text styles</a:t>
             </a:r>
           </a:p>
           <a:p>
             <a:pPr lvl="1"/>
             <a:r>
-              <a:rPr lang="en-US" smtClean="0"/>
+              <a:rPr lang="en-US"/>
               <a:t>Second level</a:t>
             </a:r>
           </a:p>
           <a:p>
             <a:pPr lvl="2"/>
             <a:r>
-              <a:rPr lang="en-US" smtClean="0"/>
+              <a:rPr lang="en-US"/>
               <a:t>Third level</a:t>
             </a:r>
           </a:p>
           <a:p>
             <a:pPr lvl="3"/>
             <a:r>
-              <a:rPr lang="en-US" smtClean="0"/>
+              <a:rPr lang="en-US"/>
               <a:t>Fourth level</a:t>
             </a:r>
           </a:p>
           <a:p>
             <a:pPr lvl="4"/>
             <a:r>
-              <a:rPr lang="en-US" smtClean="0"/>
+              <a:rPr lang="en-US"/>
               <a:t>Fifth level</a:t>
             </a:r>
-            <a:endParaRPr lang="en-US"/>
           </a:p>
         </p:txBody>
       </p:sp>
@@ -817,7 +825,7 @@
           <a:p>
             <a:fld id="{5BCAD085-E8A6-8845-BD4E-CB4CCA059FC4}" type="datetimeFigureOut">
               <a:rPr lang="en-US" smtClean="0"/>
-              <a:t>1/27/13</a:t>
+              <a:t>9/23/26</a:t>
             </a:fld>
             <a:endParaRPr lang="en-US"/>
           </a:p>
@@ -920,10 +928,9 @@
           </a:lstStyle>
           <a:p>
             <a:r>
-              <a:rPr lang="en-US" smtClean="0"/>
+              <a:rPr lang="en-US"/>
               <a:t>Click to edit Master title style</a:t>
             </a:r>
-            <a:endParaRPr lang="en-US"/>
           </a:p>
         </p:txBody>
       </p:sp>
@@ -1040,7 +1047,7 @@
           <a:p>
             <a:pPr lvl="0"/>
             <a:r>
-              <a:rPr lang="en-US" smtClean="0"/>
+              <a:rPr lang="en-US"/>
               <a:t>Click to edit Master text styles</a:t>
             </a:r>
           </a:p>
@@ -1063,7 +1070,7 @@
           <a:p>
             <a:fld id="{5BCAD085-E8A6-8845-BD4E-CB4CCA059FC4}" type="datetimeFigureOut">
               <a:rPr lang="en-US" smtClean="0"/>
-              <a:t>1/27/13</a:t>
+              <a:t>9/23/26</a:t>
             </a:fld>
             <a:endParaRPr lang="en-US"/>
           </a:p>
@@ -1157,10 +1164,9 @@
           <a:lstStyle/>
           <a:p>
             <a:r>
-              <a:rPr lang="en-US" smtClean="0"/>
+              <a:rPr lang="en-US"/>
               <a:t>Click to edit Master title style</a:t>
             </a:r>
-            <a:endParaRPr lang="en-US"/>
           </a:p>
         </p:txBody>
       </p:sp>
@@ -1214,38 +1220,37 @@
           <a:p>
             <a:pPr lvl="0"/>
             <a:r>
-              <a:rPr lang="en-US" smtClean="0"/>
+              <a:rPr lang="en-US"/>
               <a:t>Click to edit Master text styles</a:t>
             </a:r>
           </a:p>
           <a:p>
             <a:pPr lvl="1"/>
             <a:r>
-              <a:rPr lang="en-US" smtClean="0"/>
+              <a:rPr lang="en-US"/>
               <a:t>Second level</a:t>
             </a:r>
           </a:p>
           <a:p>
             <a:pPr lvl="2"/>
             <a:r>
-              <a:rPr lang="en-US" smtClean="0"/>
+              <a:rPr lang="en-US"/>
               <a:t>Third level</a:t>
             </a:r>
           </a:p>
           <a:p>
             <a:pPr lvl="3"/>
             <a:r>
-              <a:rPr lang="en-US" smtClean="0"/>
+              <a:rPr lang="en-US"/>
               <a:t>Fourth level</a:t>
             </a:r>
           </a:p>
           <a:p>
             <a:pPr lvl="4"/>
             <a:r>
-              <a:rPr lang="en-US" smtClean="0"/>
+              <a:rPr lang="en-US"/>
               <a:t>Fifth level</a:t>
             </a:r>
-            <a:endParaRPr lang="en-US"/>
           </a:p>
         </p:txBody>
       </p:sp>
@@ -1299,38 +1304,37 @@
           <a:p>
             <a:pPr lvl="0"/>
             <a:r>
-              <a:rPr lang="en-US" smtClean="0"/>
+              <a:rPr lang="en-US"/>
               <a:t>Click to edit Master text styles</a:t>
             </a:r>
           </a:p>
           <a:p>
             <a:pPr lvl="1"/>
             <a:r>
-              <a:rPr lang="en-US" smtClean="0"/>
+              <a:rPr lang="en-US"/>
               <a:t>Second level</a:t>
             </a:r>
           </a:p>
           <a:p>
             <a:pPr lvl="2"/>
             <a:r>
-              <a:rPr lang="en-US" smtClean="0"/>
+              <a:rPr lang="en-US"/>
               <a:t>Third level</a:t>
             </a:r>
           </a:p>
           <a:p>
             <a:pPr lvl="3"/>
             <a:r>
-              <a:rPr lang="en-US" smtClean="0"/>
+              <a:rPr lang="en-US"/>
               <a:t>Fourth level</a:t>
             </a:r>
           </a:p>
           <a:p>
             <a:pPr lvl="4"/>
             <a:r>
-              <a:rPr lang="en-US" smtClean="0"/>
+              <a:rPr lang="en-US"/>
               <a:t>Fifth level</a:t>
             </a:r>
-            <a:endParaRPr lang="en-US"/>
           </a:p>
         </p:txBody>
       </p:sp>
@@ -1351,7 +1355,7 @@
           <a:p>
             <a:fld id="{5BCAD085-E8A6-8845-BD4E-CB4CCA059FC4}" type="datetimeFigureOut">
               <a:rPr lang="en-US" smtClean="0"/>
-              <a:t>1/27/13</a:t>
+              <a:t>9/23/26</a:t>
             </a:fld>
             <a:endParaRPr lang="en-US"/>
           </a:p>
@@ -1449,10 +1453,9 @@
           </a:lstStyle>
           <a:p>
             <a:r>
-              <a:rPr lang="en-US" smtClean="0"/>
+              <a:rPr lang="en-US"/>
               <a:t>Click to edit Master title style</a:t>
             </a:r>
-            <a:endParaRPr lang="en-US"/>
           </a:p>
         </p:txBody>
       </p:sp>
@@ -1515,7 +1518,7 @@
           <a:p>
             <a:pPr lvl="0"/>
             <a:r>
-              <a:rPr lang="en-US" smtClean="0"/>
+              <a:rPr lang="en-US"/>
               <a:t>Click to edit Master text styles</a:t>
             </a:r>
           </a:p>
@@ -1571,38 +1574,37 @@
           <a:p>
             <a:pPr lvl="0"/>
             <a:r>
-              <a:rPr lang="en-US" smtClean="0"/>
+              <a:rPr lang="en-US"/>
               <a:t>Click to edit Master text styles</a:t>
             </a:r>
           </a:p>
           <a:p>
             <a:pPr lvl="1"/>
             <a:r>
-              <a:rPr lang="en-US" smtClean="0"/>
+              <a:rPr lang="en-US"/>
               <a:t>Second level</a:t>
             </a:r>
           </a:p>
           <a:p>
             <a:pPr lvl="2"/>
             <a:r>
-              <a:rPr lang="en-US" smtClean="0"/>
+              <a:rPr lang="en-US"/>
               <a:t>Third level</a:t>
             </a:r>
           </a:p>
           <a:p>
             <a:pPr lvl="3"/>
             <a:r>
-              <a:rPr lang="en-US" smtClean="0"/>
+              <a:rPr lang="en-US"/>
               <a:t>Fourth level</a:t>
             </a:r>
           </a:p>
           <a:p>
             <a:pPr lvl="4"/>
             <a:r>
-              <a:rPr lang="en-US" smtClean="0"/>
+              <a:rPr lang="en-US"/>
               <a:t>Fifth level</a:t>
             </a:r>
-            <a:endParaRPr lang="en-US"/>
           </a:p>
         </p:txBody>
       </p:sp>
@@ -1665,7 +1667,7 @@
           <a:p>
             <a:pPr lvl="0"/>
             <a:r>
-              <a:rPr lang="en-US" smtClean="0"/>
+              <a:rPr lang="en-US"/>
               <a:t>Click to edit Master text styles</a:t>
             </a:r>
           </a:p>
@@ -1721,38 +1723,37 @@
           <a:p>
             <a:pPr lvl="0"/>
             <a:r>
-              <a:rPr lang="en-US" smtClean="0"/>
+              <a:rPr lang="en-US"/>
               <a:t>Click to edit Master text styles</a:t>
             </a:r>
           </a:p>
           <a:p>
             <a:pPr lvl="1"/>
             <a:r>
-              <a:rPr lang="en-US" smtClean="0"/>
+              <a:rPr lang="en-US"/>
               <a:t>Second level</a:t>
             </a:r>
           </a:p>
           <a:p>
             <a:pPr lvl="2"/>
             <a:r>
-              <a:rPr lang="en-US" smtClean="0"/>
+              <a:rPr lang="en-US"/>
               <a:t>Third level</a:t>
             </a:r>
           </a:p>
           <a:p>
             <a:pPr lvl="3"/>
             <a:r>
-              <a:rPr lang="en-US" smtClean="0"/>
+              <a:rPr lang="en-US"/>
               <a:t>Fourth level</a:t>
             </a:r>
           </a:p>
           <a:p>
             <a:pPr lvl="4"/>
             <a:r>
-              <a:rPr lang="en-US" smtClean="0"/>
+              <a:rPr lang="en-US"/>
               <a:t>Fifth level</a:t>
             </a:r>
-            <a:endParaRPr lang="en-US"/>
           </a:p>
         </p:txBody>
       </p:sp>
@@ -1773,7 +1774,7 @@
           <a:p>
             <a:fld id="{5BCAD085-E8A6-8845-BD4E-CB4CCA059FC4}" type="datetimeFigureOut">
               <a:rPr lang="en-US" smtClean="0"/>
-              <a:t>1/27/13</a:t>
+              <a:t>9/23/26</a:t>
             </a:fld>
             <a:endParaRPr lang="en-US"/>
           </a:p>
@@ -1867,10 +1868,9 @@
           <a:lstStyle/>
           <a:p>
             <a:r>
-              <a:rPr lang="en-US" smtClean="0"/>
+              <a:rPr lang="en-US"/>
               <a:t>Click to edit Master title style</a:t>
             </a:r>
-            <a:endParaRPr lang="en-US"/>
           </a:p>
         </p:txBody>
       </p:sp>
@@ -1891,7 +1891,7 @@
           <a:p>
             <a:fld id="{5BCAD085-E8A6-8845-BD4E-CB4CCA059FC4}" type="datetimeFigureOut">
               <a:rPr lang="en-US" smtClean="0"/>
-              <a:t>1/27/13</a:t>
+              <a:t>9/23/26</a:t>
             </a:fld>
             <a:endParaRPr lang="en-US"/>
           </a:p>
@@ -1986,7 +1986,7 @@
           <a:p>
             <a:fld id="{5BCAD085-E8A6-8845-BD4E-CB4CCA059FC4}" type="datetimeFigureOut">
               <a:rPr lang="en-US" smtClean="0"/>
-              <a:t>1/27/13</a:t>
+              <a:t>9/23/26</a:t>
             </a:fld>
             <a:endParaRPr lang="en-US"/>
           </a:p>
@@ -2089,10 +2089,9 @@
           </a:lstStyle>
           <a:p>
             <a:r>
-              <a:rPr lang="en-US" smtClean="0"/>
+              <a:rPr lang="en-US"/>
               <a:t>Click to edit Master title style</a:t>
             </a:r>
-            <a:endParaRPr lang="en-US"/>
           </a:p>
         </p:txBody>
       </p:sp>
@@ -2146,38 +2145,37 @@
           <a:p>
             <a:pPr lvl="0"/>
             <a:r>
-              <a:rPr lang="en-US" smtClean="0"/>
+              <a:rPr lang="en-US"/>
               <a:t>Click to edit Master text styles</a:t>
             </a:r>
           </a:p>
           <a:p>
             <a:pPr lvl="1"/>
             <a:r>
-              <a:rPr lang="en-US" smtClean="0"/>
+              <a:rPr lang="en-US"/>
               <a:t>Second level</a:t>
             </a:r>
           </a:p>
           <a:p>
             <a:pPr lvl="2"/>
             <a:r>
-              <a:rPr lang="en-US" smtClean="0"/>
+              <a:rPr lang="en-US"/>
               <a:t>Third level</a:t>
             </a:r>
           </a:p>
           <a:p>
             <a:pPr lvl="3"/>
             <a:r>
-              <a:rPr lang="en-US" smtClean="0"/>
+              <a:rPr lang="en-US"/>
               <a:t>Fourth level</a:t>
             </a:r>
           </a:p>
           <a:p>
             <a:pPr lvl="4"/>
             <a:r>
-              <a:rPr lang="en-US" smtClean="0"/>
+              <a:rPr lang="en-US"/>
               <a:t>Fifth level</a:t>
             </a:r>
-            <a:endParaRPr lang="en-US"/>
           </a:p>
         </p:txBody>
       </p:sp>
@@ -2240,7 +2238,7 @@
           <a:p>
             <a:pPr lvl="0"/>
             <a:r>
-              <a:rPr lang="en-US" smtClean="0"/>
+              <a:rPr lang="en-US"/>
               <a:t>Click to edit Master text styles</a:t>
             </a:r>
           </a:p>
@@ -2263,7 +2261,7 @@
           <a:p>
             <a:fld id="{5BCAD085-E8A6-8845-BD4E-CB4CCA059FC4}" type="datetimeFigureOut">
               <a:rPr lang="en-US" smtClean="0"/>
-              <a:t>1/27/13</a:t>
+              <a:t>9/23/26</a:t>
             </a:fld>
             <a:endParaRPr lang="en-US"/>
           </a:p>
@@ -2366,10 +2364,9 @@
           </a:lstStyle>
           <a:p>
             <a:r>
-              <a:rPr lang="en-US" smtClean="0"/>
+              <a:rPr lang="en-US"/>
               <a:t>Click to edit Master title style</a:t>
             </a:r>
-            <a:endParaRPr lang="en-US"/>
           </a:p>
         </p:txBody>
       </p:sp>
@@ -2493,7 +2490,7 @@
           <a:p>
             <a:pPr lvl="0"/>
             <a:r>
-              <a:rPr lang="en-US" smtClean="0"/>
+              <a:rPr lang="en-US"/>
               <a:t>Click to edit Master text styles</a:t>
             </a:r>
           </a:p>
@@ -2516,7 +2513,7 @@
           <a:p>
             <a:fld id="{5BCAD085-E8A6-8845-BD4E-CB4CCA059FC4}" type="datetimeFigureOut">
               <a:rPr lang="en-US" smtClean="0"/>
-              <a:t>1/27/13</a:t>
+              <a:t>9/23/26</a:t>
             </a:fld>
             <a:endParaRPr lang="en-US"/>
           </a:p>
@@ -2625,10 +2622,9 @@
           <a:lstStyle/>
           <a:p>
             <a:r>
-              <a:rPr lang="en-US" smtClean="0"/>
+              <a:rPr lang="en-US"/>
               <a:t>Click to edit Master title style</a:t>
             </a:r>
-            <a:endParaRPr lang="en-US"/>
           </a:p>
         </p:txBody>
       </p:sp>
@@ -2659,38 +2655,37 @@
           <a:p>
             <a:pPr lvl="0"/>
             <a:r>
-              <a:rPr lang="en-US" smtClean="0"/>
+              <a:rPr lang="en-US"/>
               <a:t>Click to edit Master text styles</a:t>
             </a:r>
           </a:p>
           <a:p>
             <a:pPr lvl="1"/>
             <a:r>
-              <a:rPr lang="en-US" smtClean="0"/>
+              <a:rPr lang="en-US"/>
               <a:t>Second level</a:t>
             </a:r>
           </a:p>
           <a:p>
             <a:pPr lvl="2"/>
             <a:r>
-              <a:rPr lang="en-US" smtClean="0"/>
+              <a:rPr lang="en-US"/>
               <a:t>Third level</a:t>
             </a:r>
           </a:p>
           <a:p>
             <a:pPr lvl="3"/>
             <a:r>
-              <a:rPr lang="en-US" smtClean="0"/>
+              <a:rPr lang="en-US"/>
               <a:t>Fourth level</a:t>
             </a:r>
           </a:p>
           <a:p>
             <a:pPr lvl="4"/>
             <a:r>
-              <a:rPr lang="en-US" smtClean="0"/>
+              <a:rPr lang="en-US"/>
               <a:t>Fifth level</a:t>
             </a:r>
-            <a:endParaRPr lang="en-US"/>
           </a:p>
         </p:txBody>
       </p:sp>
@@ -2729,7 +2724,7 @@
           <a:p>
             <a:fld id="{5BCAD085-E8A6-8845-BD4E-CB4CCA059FC4}" type="datetimeFigureOut">
               <a:rPr lang="en-US" smtClean="0"/>
-              <a:t>1/27/13</a:t>
+              <a:t>9/23/26</a:t>
             </a:fld>
             <a:endParaRPr lang="en-US"/>
           </a:p>
@@ -3088,7 +3083,7 @@
 </file>
 
 <file path=ppt/slides/slide1.xml><?xml version="1.0" encoding="utf-8"?>
-<p:sld xmlns:a="http://schemas.openxmlformats.org/drawingml/2006/main" xmlns:p="http://schemas.openxmlformats.org/presentationml/2006/main" xmlns:r="http://schemas.openxmlformats.org/officeDocument/2006/relationships">
+<p:sld xmlns:a="http://schemas.openxmlformats.org/drawingml/2006/main" xmlns:r="http://schemas.openxmlformats.org/officeDocument/2006/relationships" xmlns:p="http://schemas.openxmlformats.org/presentationml/2006/main">
   <p:cSld>
     <p:spTree>
       <p:nvGrpSpPr>
@@ -3096,7 +3091,14 @@
         <p:cNvGrpSpPr/>
         <p:nvPr/>
       </p:nvGrpSpPr>
-      <p:grpSpPr/>
+      <p:grpSpPr>
+        <a:xfrm>
+          <a:off x="0" y="0"/>
+          <a:ext cx="0" cy="0"/>
+          <a:chOff x="0" y="0"/>
+          <a:chExt cx="0" cy="0"/>
+        </a:xfrm>
+      </p:grpSpPr>
       <p:sp>
         <p:nvSpPr>
           <p:cNvPr id="2" name="Rectangle 1"/>
@@ -3138,6 +3140,7 @@
           <a:lstStyle/>
           <a:p>
             <a:pPr algn="ctr"/>
+            <a:endParaRPr/>
           </a:p>
         </p:txBody>
       </p:sp>
@@ -3206,6 +3209,7 @@
           <a:lstStyle/>
           <a:p>
             <a:pPr algn="ctr"/>
+            <a:endParaRPr/>
           </a:p>
         </p:txBody>
       </p:sp>
@@ -3337,7 +3341,7 @@
                 </a:solidFill>
                 <a:latin typeface="Calibri"/>
               </a:rPr>
-              <a:t>What we found so far — a progress report</a:t>
+              <a:t>Progress report: an initial result, then a model correction</a:t>
             </a:r>
           </a:p>
         </p:txBody>
@@ -3350,8 +3354,8 @@
         </p:nvSpPr>
         <p:spPr>
           <a:xfrm>
-            <a:off x="822960" y="5943600"/>
-            <a:ext cx="8229600" cy="457200"/>
+            <a:off x="807415" y="5074485"/>
+            <a:ext cx="8229600" cy="785600"/>
           </a:xfrm>
           <a:prstGeom prst="rect">
             <a:avLst/>
@@ -3370,13 +3374,84 @@
               </a:lnSpc>
             </a:pPr>
             <a:r>
-              <a:rPr sz="1300" b="0" i="0">
+              <a:rPr lang="en-AU" sz="1300" b="1" i="0" dirty="0">
                 <a:solidFill>
                   <a:srgbClr val="55503F"/>
                 </a:solidFill>
                 <a:latin typeface="Calibri"/>
               </a:rPr>
-              <a:t>Amy Bing   ·   Tingying Huang</a:t>
+              <a:t>Group</a:t>
+            </a:r>
+            <a:r>
+              <a:rPr lang="zh-CN" altLang="en-US" sz="1300" b="1" i="0" dirty="0">
+                <a:solidFill>
+                  <a:srgbClr val="55503F"/>
+                </a:solidFill>
+                <a:latin typeface="Calibri"/>
+              </a:rPr>
+              <a:t> </a:t>
+            </a:r>
+            <a:r>
+              <a:rPr lang="en-US" altLang="zh-CN" sz="1300" b="1" i="0" dirty="0">
+                <a:solidFill>
+                  <a:srgbClr val="55503F"/>
+                </a:solidFill>
+                <a:latin typeface="Calibri"/>
+              </a:rPr>
+              <a:t>member</a:t>
+            </a:r>
+            <a:r>
+              <a:rPr lang="zh-CN" altLang="en-US" sz="1300" b="1" i="0" dirty="0">
+                <a:solidFill>
+                  <a:srgbClr val="55503F"/>
+                </a:solidFill>
+                <a:latin typeface="Calibri"/>
+              </a:rPr>
+              <a:t>：</a:t>
+            </a:r>
+            <a:endParaRPr lang="en-AU" sz="1300" b="1" i="0" dirty="0">
+              <a:solidFill>
+                <a:srgbClr val="55503F"/>
+              </a:solidFill>
+              <a:latin typeface="Calibri"/>
+            </a:endParaRPr>
+          </a:p>
+          <a:p>
+            <a:pPr algn="l">
+              <a:lnSpc>
+                <a:spcPct val="118000"/>
+              </a:lnSpc>
+            </a:pPr>
+            <a:r>
+              <a:rPr sz="1300" b="0" i="0" dirty="0">
+                <a:solidFill>
+                  <a:srgbClr val="55503F"/>
+                </a:solidFill>
+                <a:latin typeface="Calibri"/>
+              </a:rPr>
+              <a:t>Amy Bing  </a:t>
+            </a:r>
+            <a:endParaRPr lang="en-AU" sz="1300" dirty="0">
+              <a:solidFill>
+                <a:srgbClr val="55503F"/>
+              </a:solidFill>
+              <a:latin typeface="Calibri"/>
+            </a:endParaRPr>
+          </a:p>
+          <a:p>
+            <a:pPr algn="l">
+              <a:lnSpc>
+                <a:spcPct val="118000"/>
+              </a:lnSpc>
+            </a:pPr>
+            <a:r>
+              <a:rPr sz="1300" b="0" i="0" dirty="0">
+                <a:solidFill>
+                  <a:srgbClr val="55503F"/>
+                </a:solidFill>
+                <a:latin typeface="Calibri"/>
+              </a:rPr>
+              <a:t>Tingying Huang</a:t>
             </a:r>
           </a:p>
         </p:txBody>
@@ -3390,7 +3465,7 @@
 </file>
 
 <file path=ppt/slides/slide10.xml><?xml version="1.0" encoding="utf-8"?>
-<p:sld xmlns:a="http://schemas.openxmlformats.org/drawingml/2006/main" xmlns:p="http://schemas.openxmlformats.org/presentationml/2006/main" xmlns:r="http://schemas.openxmlformats.org/officeDocument/2006/relationships">
+<p:sld xmlns:a="http://schemas.openxmlformats.org/drawingml/2006/main" xmlns:r="http://schemas.openxmlformats.org/officeDocument/2006/relationships" xmlns:p="http://schemas.openxmlformats.org/presentationml/2006/main">
   <p:cSld>
     <p:spTree>
       <p:nvGrpSpPr>
@@ -3398,7 +3473,14 @@
         <p:cNvGrpSpPr/>
         <p:nvPr/>
       </p:nvGrpSpPr>
-      <p:grpSpPr/>
+      <p:grpSpPr>
+        <a:xfrm>
+          <a:off x="0" y="0"/>
+          <a:ext cx="0" cy="0"/>
+          <a:chOff x="0" y="0"/>
+          <a:chExt cx="0" cy="0"/>
+        </a:xfrm>
+      </p:grpSpPr>
       <p:sp>
         <p:nvSpPr>
           <p:cNvPr id="2" name="Rectangle 1"/>
@@ -3440,6 +3522,7 @@
           <a:lstStyle/>
           <a:p>
             <a:pPr algn="ctr"/>
+            <a:endParaRPr/>
           </a:p>
         </p:txBody>
       </p:sp>
@@ -3508,6 +3591,7 @@
           <a:lstStyle/>
           <a:p>
             <a:pPr algn="ctr"/>
+            <a:endParaRPr/>
           </a:p>
         </p:txBody>
       </p:sp>
@@ -3584,7 +3668,7 @@
                 </a:solidFill>
                 <a:latin typeface="Calibri"/>
               </a:rPr>
-              <a:t>Full numbers and setup: research_brief.pdf and progress_brief.pdf.</a:t>
+              <a:t>Presentation 3: network incentives, mechanism, and final recommendation.</a:t>
             </a:r>
           </a:p>
         </p:txBody>
@@ -3676,7 +3760,7 @@
 </file>
 
 <file path=ppt/slides/slide2.xml><?xml version="1.0" encoding="utf-8"?>
-<p:sld xmlns:a="http://schemas.openxmlformats.org/drawingml/2006/main" xmlns:p="http://schemas.openxmlformats.org/presentationml/2006/main" xmlns:r="http://schemas.openxmlformats.org/officeDocument/2006/relationships">
+<p:sld xmlns:a="http://schemas.openxmlformats.org/drawingml/2006/main" xmlns:r="http://schemas.openxmlformats.org/officeDocument/2006/relationships" xmlns:p="http://schemas.openxmlformats.org/presentationml/2006/main">
   <p:cSld>
     <p:spTree>
       <p:nvGrpSpPr>
@@ -3684,7 +3768,14 @@
         <p:cNvGrpSpPr/>
         <p:nvPr/>
       </p:nvGrpSpPr>
-      <p:grpSpPr/>
+      <p:grpSpPr>
+        <a:xfrm>
+          <a:off x="0" y="0"/>
+          <a:ext cx="0" cy="0"/>
+          <a:chOff x="0" y="0"/>
+          <a:chExt cx="0" cy="0"/>
+        </a:xfrm>
+      </p:grpSpPr>
       <p:sp>
         <p:nvSpPr>
           <p:cNvPr id="2" name="Rectangle 1"/>
@@ -3726,6 +3817,7 @@
           <a:lstStyle/>
           <a:p>
             <a:pPr algn="ctr"/>
+            <a:endParaRPr/>
           </a:p>
         </p:txBody>
       </p:sp>
@@ -3763,7 +3855,7 @@
                 </a:solidFill>
                 <a:latin typeface="Calibri"/>
               </a:rPr>
-              <a:t>WHERE WE LEFT OFF</a:t>
+              <a:t>RESEARCH PROGRESS</a:t>
             </a:r>
           </a:p>
         </p:txBody>
@@ -3802,7 +3894,7 @@
                 </a:solidFill>
                 <a:latin typeface="Georgia"/>
               </a:rPr>
-              <a:t>The plan from last time</a:t>
+              <a:t>How the analysis changed</a:t>
             </a:r>
           </a:p>
         </p:txBody>
@@ -3841,7 +3933,7 @@
                 </a:solidFill>
                 <a:latin typeface="Calibri"/>
               </a:rPr>
-              <a:t>Does network position predict grades, beyond popularity and direct friends? Plan: Katz-Bonacich centrality, swept across φ.</a:t>
+              <a:t>Our question remains: does outgoing network reach predict later grades beyond prior GPA and direct contacts? The important progress was discovering which data can answer it.</a:t>
             </a:r>
           </a:p>
         </p:txBody>
@@ -3887,7 +3979,7 @@
           </a:fontRef>
         </p:style>
         <p:txBody>
-          <a:bodyPr rtlCol="0" anchor="ctr" wrap="square" lIns="109728" rIns="109728"/>
+          <a:bodyPr wrap="square" lIns="109728" rIns="109728" rtlCol="0" anchor="ctr"/>
           <a:lstStyle/>
           <a:p>
             <a:pPr algn="ctr"/>
@@ -3976,7 +4068,7 @@
                 </a:solidFill>
                 <a:latin typeface="Calibri"/>
               </a:rPr>
-              <a:t>Confirm the data behaves</a:t>
+              <a:t>Confirm known GPA</a:t>
             </a:r>
           </a:p>
           <a:p>
@@ -3992,53 +4084,14 @@
                 </a:solidFill>
                 <a:latin typeface="Calibri"/>
               </a:rPr>
-              <a:t>the way prior work found.</a:t>
-            </a:r>
-          </a:p>
-        </p:txBody>
-      </p:sp>
-      <p:sp>
-        <p:nvSpPr>
-          <p:cNvPr id="9" name="TextBox 8"/>
-          <p:cNvSpPr txBox="1"/>
-          <p:nvPr/>
-        </p:nvSpPr>
-        <p:spPr>
-          <a:xfrm>
-            <a:off x="3246120" y="2889504"/>
-            <a:ext cx="256032" cy="685800"/>
-          </a:xfrm>
-          <a:prstGeom prst="rect">
-            <a:avLst/>
-          </a:prstGeom>
-          <a:noFill/>
-        </p:spPr>
-        <p:txBody>
-          <a:bodyPr wrap="square" anchor="ctr">
-            <a:spAutoFit/>
-          </a:bodyPr>
-          <a:lstStyle/>
-          <a:p>
-            <a:pPr algn="ctr">
-              <a:lnSpc>
-                <a:spcPct val="118000"/>
-              </a:lnSpc>
-            </a:pPr>
-            <a:r>
-              <a:rPr sz="2000" b="1" i="0">
-                <a:solidFill>
-                  <a:srgbClr val="DDD8CD"/>
-                </a:solidFill>
-                <a:latin typeface="Calibri"/>
-              </a:rPr>
-              <a:t>→</a:t>
-            </a:r>
-          </a:p>
-        </p:txBody>
-      </p:sp>
-      <p:sp>
-        <p:nvSpPr>
-          <p:cNvPr id="10" name="Rounded Rectangle 9"/>
+              <a:t>and tie patterns.</a:t>
+            </a:r>
+          </a:p>
+        </p:txBody>
+      </p:sp>
+      <p:sp>
+        <p:nvSpPr>
+          <p:cNvPr id="9" name="Rounded Rectangle 8"/>
           <p:cNvSpPr/>
           <p:nvPr/>
         </p:nvSpPr>
@@ -4077,7 +4130,7 @@
           </a:fontRef>
         </p:style>
         <p:txBody>
-          <a:bodyPr rtlCol="0" anchor="ctr" wrap="square" lIns="109728" rIns="109728"/>
+          <a:bodyPr wrap="square" lIns="109728" rIns="109728" rtlCol="0" anchor="ctr"/>
           <a:lstStyle/>
           <a:p>
             <a:pPr algn="ctr"/>
@@ -4095,7 +4148,7 @@
       </p:sp>
       <p:sp>
         <p:nvSpPr>
-          <p:cNvPr id="11" name="TextBox 10"/>
+          <p:cNvPr id="10" name="TextBox 9"/>
           <p:cNvSpPr txBox="1"/>
           <p:nvPr/>
         </p:nvSpPr>
@@ -4127,14 +4180,14 @@
                 </a:solidFill>
                 <a:latin typeface="Calibri"/>
               </a:rPr>
-              <a:t>Naive test</a:t>
-            </a:r>
-          </a:p>
-        </p:txBody>
-      </p:sp>
-      <p:sp>
-        <p:nvSpPr>
-          <p:cNvPr id="12" name="TextBox 11"/>
+              <a:t>Initial result</a:t>
+            </a:r>
+          </a:p>
+        </p:txBody>
+      </p:sp>
+      <p:sp>
+        <p:nvSpPr>
+          <p:cNvPr id="11" name="TextBox 10"/>
           <p:cNvSpPr txBox="1"/>
           <p:nvPr/>
         </p:nvSpPr>
@@ -4166,7 +4219,7 @@
                 </a:solidFill>
                 <a:latin typeface="Calibri"/>
               </a:rPr>
-              <a:t>Position alone,</a:t>
+              <a:t>Estimate a pooled</a:t>
             </a:r>
           </a:p>
           <a:p>
@@ -4182,53 +4235,14 @@
                 </a:solidFill>
                 <a:latin typeface="Calibri"/>
               </a:rPr>
-              <a:t>no popularity control.</a:t>
-            </a:r>
-          </a:p>
-        </p:txBody>
-      </p:sp>
-      <p:sp>
-        <p:nvSpPr>
-          <p:cNvPr id="13" name="TextBox 12"/>
-          <p:cNvSpPr txBox="1"/>
-          <p:nvPr/>
-        </p:nvSpPr>
-        <p:spPr>
-          <a:xfrm>
-            <a:off x="6108192" y="2889504"/>
-            <a:ext cx="256032" cy="685800"/>
-          </a:xfrm>
-          <a:prstGeom prst="rect">
-            <a:avLst/>
-          </a:prstGeom>
-          <a:noFill/>
-        </p:spPr>
-        <p:txBody>
-          <a:bodyPr wrap="square" anchor="ctr">
-            <a:spAutoFit/>
-          </a:bodyPr>
-          <a:lstStyle/>
-          <a:p>
-            <a:pPr algn="ctr">
-              <a:lnSpc>
-                <a:spcPct val="118000"/>
-              </a:lnSpc>
-            </a:pPr>
-            <a:r>
-              <a:rPr sz="2000" b="1" i="0">
-                <a:solidFill>
-                  <a:srgbClr val="DDD8CD"/>
-                </a:solidFill>
-                <a:latin typeface="Calibri"/>
-              </a:rPr>
-              <a:t>→</a:t>
-            </a:r>
-          </a:p>
-        </p:txBody>
-      </p:sp>
-      <p:sp>
-        <p:nvSpPr>
-          <p:cNvPr id="14" name="Rounded Rectangle 13"/>
+              <a:t>Katz--GPA association.</a:t>
+            </a:r>
+          </a:p>
+        </p:txBody>
+      </p:sp>
+      <p:sp>
+        <p:nvSpPr>
+          <p:cNvPr id="12" name="Rounded Rectangle 11"/>
           <p:cNvSpPr/>
           <p:nvPr/>
         </p:nvSpPr>
@@ -4267,7 +4281,7 @@
           </a:fontRef>
         </p:style>
         <p:txBody>
-          <a:bodyPr rtlCol="0" anchor="ctr" wrap="square" lIns="109728" rIns="109728"/>
+          <a:bodyPr wrap="square" lIns="109728" rIns="109728" rtlCol="0" anchor="ctr"/>
           <a:lstStyle/>
           <a:p>
             <a:pPr algn="ctr"/>
@@ -4285,7 +4299,7 @@
       </p:sp>
       <p:sp>
         <p:nvSpPr>
-          <p:cNvPr id="15" name="TextBox 14"/>
+          <p:cNvPr id="13" name="TextBox 12"/>
           <p:cNvSpPr txBox="1"/>
           <p:nvPr/>
         </p:nvSpPr>
@@ -4317,14 +4331,14 @@
                 </a:solidFill>
                 <a:latin typeface="Calibri"/>
               </a:rPr>
-              <a:t>Planned test</a:t>
-            </a:r>
-          </a:p>
-        </p:txBody>
-      </p:sp>
-      <p:sp>
-        <p:nvSpPr>
-          <p:cNvPr id="16" name="TextBox 15"/>
+              <a:t>Audit</a:t>
+            </a:r>
+          </a:p>
+        </p:txBody>
+      </p:sp>
+      <p:sp>
+        <p:nvSpPr>
+          <p:cNvPr id="14" name="TextBox 13"/>
           <p:cNvSpPr txBox="1"/>
           <p:nvPr/>
         </p:nvSpPr>
@@ -4356,7 +4370,7 @@
                 </a:solidFill>
                 <a:latin typeface="Calibri"/>
               </a:rPr>
-              <a:t>Add popularity, sweep φ,</a:t>
+              <a:t>Check time order and</a:t>
             </a:r>
           </a:p>
           <a:p>
@@ -4372,53 +4386,14 @@
                 </a:solidFill>
                 <a:latin typeface="Calibri"/>
               </a:rPr>
-              <a:t>pool all 5 groups.</a:t>
-            </a:r>
-          </a:p>
-        </p:txBody>
-      </p:sp>
-      <p:sp>
-        <p:nvSpPr>
-          <p:cNvPr id="17" name="TextBox 16"/>
-          <p:cNvSpPr txBox="1"/>
-          <p:nvPr/>
-        </p:nvSpPr>
-        <p:spPr>
-          <a:xfrm>
-            <a:off x="8970264" y="2889504"/>
-            <a:ext cx="256032" cy="685800"/>
-          </a:xfrm>
-          <a:prstGeom prst="rect">
-            <a:avLst/>
-          </a:prstGeom>
-          <a:noFill/>
-        </p:spPr>
-        <p:txBody>
-          <a:bodyPr wrap="square" anchor="ctr">
-            <a:spAutoFit/>
-          </a:bodyPr>
-          <a:lstStyle/>
-          <a:p>
-            <a:pPr algn="ctr">
-              <a:lnSpc>
-                <a:spcPct val="118000"/>
-              </a:lnSpc>
-            </a:pPr>
-            <a:r>
-              <a:rPr sz="2000" b="1" i="0">
-                <a:solidFill>
-                  <a:srgbClr val="DDD8CD"/>
-                </a:solidFill>
-                <a:latin typeface="Calibri"/>
-              </a:rPr>
-              <a:t>→</a:t>
-            </a:r>
-          </a:p>
-        </p:txBody>
-      </p:sp>
-      <p:sp>
-        <p:nvSpPr>
-          <p:cNvPr id="18" name="Rounded Rectangle 17"/>
+              <a:t>what each cohort records.</a:t>
+            </a:r>
+          </a:p>
+        </p:txBody>
+      </p:sp>
+      <p:sp>
+        <p:nvSpPr>
+          <p:cNvPr id="15" name="Rounded Rectangle 14"/>
           <p:cNvSpPr/>
           <p:nvPr/>
         </p:nvSpPr>
@@ -4457,7 +4432,7 @@
           </a:fontRef>
         </p:style>
         <p:txBody>
-          <a:bodyPr rtlCol="0" anchor="ctr" wrap="square" lIns="109728" rIns="109728"/>
+          <a:bodyPr wrap="square" lIns="109728" rIns="109728" rtlCol="0" anchor="ctr"/>
           <a:lstStyle/>
           <a:p>
             <a:pPr algn="ctr"/>
@@ -4475,7 +4450,7 @@
       </p:sp>
       <p:sp>
         <p:nvSpPr>
-          <p:cNvPr id="19" name="TextBox 18"/>
+          <p:cNvPr id="16" name="TextBox 15"/>
           <p:cNvSpPr txBox="1"/>
           <p:nvPr/>
         </p:nvSpPr>
@@ -4507,14 +4482,14 @@
                 </a:solidFill>
                 <a:latin typeface="Calibri"/>
               </a:rPr>
-              <a:t>Check + fix</a:t>
-            </a:r>
-          </a:p>
-        </p:txBody>
-      </p:sp>
-      <p:sp>
-        <p:nvSpPr>
-          <p:cNvPr id="20" name="TextBox 19"/>
+              <a:t>Corrected test</a:t>
+            </a:r>
+          </a:p>
+        </p:txBody>
+      </p:sp>
+      <p:sp>
+        <p:nvSpPr>
+          <p:cNvPr id="17" name="TextBox 16"/>
           <p:cNvSpPr txBox="1"/>
           <p:nvPr/>
         </p:nvSpPr>
@@ -4546,7 +4521,7 @@
                 </a:solidFill>
                 <a:latin typeface="Calibri"/>
               </a:rPr>
-              <a:t>Test the assumptions.</a:t>
+              <a:t>Use the school panel</a:t>
             </a:r>
           </a:p>
           <a:p>
@@ -4562,14 +4537,14 @@
                 </a:solidFill>
                 <a:latin typeface="Calibri"/>
               </a:rPr>
-              <a:t>Found one had failed.</a:t>
-            </a:r>
-          </a:p>
-        </p:txBody>
-      </p:sp>
-      <p:sp>
-        <p:nvSpPr>
-          <p:cNvPr id="21" name="Rounded Rectangle 20"/>
+              <a:t>with prior GPA.</a:t>
+            </a:r>
+          </a:p>
+        </p:txBody>
+      </p:sp>
+      <p:sp>
+        <p:nvSpPr>
+          <p:cNvPr id="18" name="Rounded Rectangle 17"/>
           <p:cNvSpPr/>
           <p:nvPr/>
         </p:nvSpPr>
@@ -4608,7 +4583,7 @@
           </a:fontRef>
         </p:style>
         <p:txBody>
-          <a:bodyPr rtlCol="0" anchor="ctr" wrap="square" lIns="109728" rIns="109728"/>
+          <a:bodyPr wrap="square" lIns="109728" rIns="109728" rtlCol="0" anchor="ctr"/>
           <a:lstStyle/>
           <a:p>
             <a:pPr algn="ctr"/>
@@ -4619,14 +4594,14 @@
                 </a:solidFill>
                 <a:latin typeface="Calibri"/>
               </a:rPr>
-              <a:t>Here's what actually happened when we ran it.</a:t>
-            </a:r>
-          </a:p>
-        </p:txBody>
-      </p:sp>
-      <p:sp>
-        <p:nvSpPr>
-          <p:cNvPr id="22" name="TextBox 21"/>
+              <a:t>The presentation reports the correction as part of the research process.</a:t>
+            </a:r>
+          </a:p>
+        </p:txBody>
+      </p:sp>
+      <p:sp>
+        <p:nvSpPr>
+          <p:cNvPr id="19" name="TextBox 18"/>
           <p:cNvSpPr txBox="1"/>
           <p:nvPr/>
         </p:nvSpPr>
@@ -4672,7 +4647,7 @@
 </file>
 
 <file path=ppt/slides/slide3.xml><?xml version="1.0" encoding="utf-8"?>
-<p:sld xmlns:a="http://schemas.openxmlformats.org/drawingml/2006/main" xmlns:p="http://schemas.openxmlformats.org/presentationml/2006/main" xmlns:r="http://schemas.openxmlformats.org/officeDocument/2006/relationships">
+<p:sld xmlns:a="http://schemas.openxmlformats.org/drawingml/2006/main" xmlns:r="http://schemas.openxmlformats.org/officeDocument/2006/relationships" xmlns:p="http://schemas.openxmlformats.org/presentationml/2006/main">
   <p:cSld>
     <p:spTree>
       <p:nvGrpSpPr>
@@ -4680,7 +4655,14 @@
         <p:cNvGrpSpPr/>
         <p:nvPr/>
       </p:nvGrpSpPr>
-      <p:grpSpPr/>
+      <p:grpSpPr>
+        <a:xfrm>
+          <a:off x="0" y="0"/>
+          <a:ext cx="0" cy="0"/>
+          <a:chOff x="0" y="0"/>
+          <a:chExt cx="0" cy="0"/>
+        </a:xfrm>
+      </p:grpSpPr>
       <p:sp>
         <p:nvSpPr>
           <p:cNvPr id="2" name="Rectangle 1"/>
@@ -4722,6 +4704,7 @@
           <a:lstStyle/>
           <a:p>
             <a:pPr algn="ctr"/>
+            <a:endParaRPr/>
           </a:p>
         </p:txBody>
       </p:sp>
@@ -4975,7 +4958,7 @@
           </a:fontRef>
         </p:style>
         <p:txBody>
-          <a:bodyPr rtlCol="0" anchor="ctr" wrap="square" lIns="109728" rIns="109728"/>
+          <a:bodyPr wrap="square" lIns="109728" rIns="109728" rtlCol="0" anchor="ctr"/>
           <a:lstStyle/>
           <a:p>
             <a:pPr algn="ctr"/>
@@ -5039,7 +5022,7 @@
 </file>
 
 <file path=ppt/slides/slide4.xml><?xml version="1.0" encoding="utf-8"?>
-<p:sld xmlns:a="http://schemas.openxmlformats.org/drawingml/2006/main" xmlns:p="http://schemas.openxmlformats.org/presentationml/2006/main" xmlns:r="http://schemas.openxmlformats.org/officeDocument/2006/relationships">
+<p:sld xmlns:a="http://schemas.openxmlformats.org/drawingml/2006/main" xmlns:r="http://schemas.openxmlformats.org/officeDocument/2006/relationships" xmlns:p="http://schemas.openxmlformats.org/presentationml/2006/main">
   <p:cSld>
     <p:spTree>
       <p:nvGrpSpPr>
@@ -5047,7 +5030,14 @@
         <p:cNvGrpSpPr/>
         <p:nvPr/>
       </p:nvGrpSpPr>
-      <p:grpSpPr/>
+      <p:grpSpPr>
+        <a:xfrm>
+          <a:off x="0" y="0"/>
+          <a:ext cx="0" cy="0"/>
+          <a:chOff x="0" y="0"/>
+          <a:chExt cx="0" cy="0"/>
+        </a:xfrm>
+      </p:grpSpPr>
       <p:sp>
         <p:nvSpPr>
           <p:cNvPr id="2" name="Rectangle 1"/>
@@ -5089,6 +5079,7 @@
           <a:lstStyle/>
           <a:p>
             <a:pPr algn="ctr"/>
+            <a:endParaRPr/>
           </a:p>
         </p:txBody>
       </p:sp>
@@ -5126,7 +5117,7 @@
                 </a:solidFill>
                 <a:latin typeface="Calibri"/>
               </a:rPr>
-              <a:t>RESULT 2</a:t>
+              <a:t>INITIAL RESULT</a:t>
             </a:r>
           </a:p>
         </p:txBody>
@@ -5165,7 +5156,7 @@
                 </a:solidFill>
                 <a:latin typeface="Georgia"/>
               </a:rPr>
-              <a:t>The naive effect is popularity, relabelled</a:t>
+              <a:t>The first pooled result looked significant</a:t>
             </a:r>
           </a:p>
         </p:txBody>
@@ -5207,7 +5198,7 @@
                 </a:solidFill>
                 <a:latin typeface="Calibri"/>
               </a:rPr>
-              <a:t>  •  +0.093   </a:t>
+              <a:t>  •  +0.089   </a:t>
             </a:r>
             <a:r>
               <a:rPr sz="1400">
@@ -5216,7 +5207,7 @@
                 </a:solidFill>
                 <a:latin typeface="Calibri"/>
               </a:rPr>
-              <a:t>Katz alone — looks like position matters</a:t>
+              <a:t>Katz alone: a positive pooled GPA association</a:t>
             </a:r>
           </a:p>
           <a:p>
@@ -5235,7 +5226,7 @@
                 </a:solidFill>
                 <a:latin typeface="Calibri"/>
               </a:rPr>
-              <a:t>  •  −0.028   </a:t>
+              <a:t>  •  +0.012   </a:t>
             </a:r>
             <a:r>
               <a:rPr sz="1400">
@@ -5244,7 +5235,7 @@
                 </a:solidFill>
                 <a:latin typeface="Calibri"/>
               </a:rPr>
-              <a:t>add degree control — no longer significant</a:t>
+              <a:t>after direct-degree controls</a:t>
             </a:r>
           </a:p>
           <a:p>
@@ -5259,11 +5250,11 @@
             <a:r>
               <a:rPr sz="1500" b="1">
                 <a:solidFill>
-                  <a:srgbClr val="2E9E5B"/>
-                </a:solidFill>
-                <a:latin typeface="Calibri"/>
-              </a:rPr>
-              <a:t>  •  +0.153   </a:t>
+                  <a:srgbClr val="55503F"/>
+                </a:solidFill>
+                <a:latin typeface="Calibri"/>
+              </a:rPr>
+              <a:t>  •  p = 0.760   </a:t>
             </a:r>
             <a:r>
               <a:rPr sz="1400">
@@ -5272,7 +5263,7 @@
                 </a:solidFill>
                 <a:latin typeface="Calibri"/>
               </a:rPr>
-              <a:t>in-degree alone — this was driving it</a:t>
+              <a:t>the adjusted Katz estimate is not significant</a:t>
             </a:r>
           </a:p>
         </p:txBody>
@@ -5294,7 +5285,7 @@
         <p:spPr>
           <a:xfrm>
             <a:off x="6126480" y="1783080"/>
-            <a:ext cx="5833531" cy="3794760"/>
+            <a:ext cx="5988606" cy="3794760"/>
           </a:xfrm>
           <a:prstGeom prst="rect">
             <a:avLst/>
@@ -5342,7 +5333,7 @@
           </a:fontRef>
         </p:style>
         <p:txBody>
-          <a:bodyPr rtlCol="0" anchor="ctr" wrap="square" lIns="109728" rIns="109728"/>
+          <a:bodyPr wrap="square" lIns="109728" rIns="109728" rtlCol="0" anchor="ctr"/>
           <a:lstStyle/>
           <a:p>
             <a:pPr algn="ctr"/>
@@ -5353,7 +5344,7 @@
                 </a:solidFill>
                 <a:latin typeface="Calibri"/>
               </a:rPr>
-              <a:t>The naive effect was popularity wearing a different name.</a:t>
+              <a:t>This was a useful signal, but it was not yet a valid test of later academic performance.</a:t>
             </a:r>
           </a:p>
         </p:txBody>
@@ -5406,7 +5397,7 @@
 </file>
 
 <file path=ppt/slides/slide5.xml><?xml version="1.0" encoding="utf-8"?>
-<p:sld xmlns:a="http://schemas.openxmlformats.org/drawingml/2006/main" xmlns:p="http://schemas.openxmlformats.org/presentationml/2006/main" xmlns:r="http://schemas.openxmlformats.org/officeDocument/2006/relationships">
+<p:sld xmlns:a="http://schemas.openxmlformats.org/drawingml/2006/main" xmlns:r="http://schemas.openxmlformats.org/officeDocument/2006/relationships" xmlns:p="http://schemas.openxmlformats.org/presentationml/2006/main">
   <p:cSld>
     <p:spTree>
       <p:nvGrpSpPr>
@@ -5414,7 +5405,14 @@
         <p:cNvGrpSpPr/>
         <p:nvPr/>
       </p:nvGrpSpPr>
-      <p:grpSpPr/>
+      <p:grpSpPr>
+        <a:xfrm>
+          <a:off x="0" y="0"/>
+          <a:ext cx="0" cy="0"/>
+          <a:chOff x="0" y="0"/>
+          <a:chExt cx="0" cy="0"/>
+        </a:xfrm>
+      </p:grpSpPr>
       <p:sp>
         <p:nvSpPr>
           <p:cNvPr id="2" name="Rectangle 1"/>
@@ -5456,6 +5454,7 @@
           <a:lstStyle/>
           <a:p>
             <a:pPr algn="ctr"/>
+            <a:endParaRPr/>
           </a:p>
         </p:txBody>
       </p:sp>
@@ -5493,7 +5492,7 @@
                 </a:solidFill>
                 <a:latin typeface="Calibri"/>
               </a:rPr>
-              <a:t>RESULT 3</a:t>
+              <a:t>MODEL AUDIT</a:t>
             </a:r>
           </a:p>
         </p:txBody>
@@ -5532,7 +5531,7 @@
                 </a:solidFill>
                 <a:latin typeface="Georgia"/>
               </a:rPr>
-              <a:t>The planned test, and a gap we found in it</a:t>
+              <a:t>The pooled university comparison cannot identify a later-GPA effect</a:t>
             </a:r>
           </a:p>
         </p:txBody>
@@ -5602,7 +5601,7 @@
           </a:fontRef>
         </p:style>
         <p:txBody>
-          <a:bodyPr rtlCol="0" anchor="ctr" wrap="square" lIns="109728" rIns="109728"/>
+          <a:bodyPr wrap="square" lIns="109728" rIns="109728" rtlCol="0" anchor="ctr"/>
           <a:lstStyle/>
           <a:p>
             <a:pPr algn="ctr"/>
@@ -5613,7 +5612,7 @@
                 </a:solidFill>
                 <a:latin typeface="Calibri"/>
               </a:rPr>
-              <a:t>Own past GPA only exists for the school group — 80% of the pooled sample can't have it.</a:t>
+              <a:t>University GPA is static: it cannot control baseline achievement or establish time order. Only school GPA repeats over time.</a:t>
             </a:r>
           </a:p>
         </p:txBody>
@@ -5666,7 +5665,7 @@
 </file>
 
 <file path=ppt/slides/slide6.xml><?xml version="1.0" encoding="utf-8"?>
-<p:sld xmlns:a="http://schemas.openxmlformats.org/drawingml/2006/main" xmlns:p="http://schemas.openxmlformats.org/presentationml/2006/main" xmlns:r="http://schemas.openxmlformats.org/officeDocument/2006/relationships">
+<p:sld xmlns:a="http://schemas.openxmlformats.org/drawingml/2006/main" xmlns:r="http://schemas.openxmlformats.org/officeDocument/2006/relationships" xmlns:p="http://schemas.openxmlformats.org/presentationml/2006/main">
   <p:cSld>
     <p:spTree>
       <p:nvGrpSpPr>
@@ -5674,7 +5673,14 @@
         <p:cNvGrpSpPr/>
         <p:nvPr/>
       </p:nvGrpSpPr>
-      <p:grpSpPr/>
+      <p:grpSpPr>
+        <a:xfrm>
+          <a:off x="0" y="0"/>
+          <a:ext cx="0" cy="0"/>
+          <a:chOff x="0" y="0"/>
+          <a:chExt cx="0" cy="0"/>
+        </a:xfrm>
+      </p:grpSpPr>
       <p:sp>
         <p:nvSpPr>
           <p:cNvPr id="2" name="Rectangle 1"/>
@@ -5716,6 +5722,7 @@
           <a:lstStyle/>
           <a:p>
             <a:pPr algn="ctr"/>
+            <a:endParaRPr/>
           </a:p>
         </p:txBody>
       </p:sp>
@@ -5753,7 +5760,7 @@
                 </a:solidFill>
                 <a:latin typeface="Calibri"/>
               </a:rPr>
-              <a:t>COMPARING THE THREE TESTS</a:t>
+              <a:t>CORRECTED PRIMARY TEST</a:t>
             </a:r>
           </a:p>
         </p:txBody>
@@ -5792,7 +5799,7 @@
                 </a:solidFill>
                 <a:latin typeface="Georgia"/>
               </a:rPr>
-              <a:t>Three specifications, three different pictures</a:t>
+              <a:t>After correcting the model, the effect is no longer significant</a:t>
             </a:r>
           </a:p>
         </p:txBody>
@@ -5813,8 +5820,8 @@
         </p:blipFill>
         <p:spPr>
           <a:xfrm>
-            <a:off x="1635537" y="1417320"/>
-            <a:ext cx="8920620" cy="4251960"/>
+            <a:off x="1744769" y="1417320"/>
+            <a:ext cx="8702156" cy="4251960"/>
           </a:xfrm>
           <a:prstGeom prst="rect">
             <a:avLst/>
@@ -5862,7 +5869,7 @@
           </a:fontRef>
         </p:style>
         <p:txBody>
-          <a:bodyPr rtlCol="0" anchor="ctr" wrap="square" lIns="109728" rIns="109728"/>
+          <a:bodyPr wrap="square" lIns="109728" rIns="109728" rtlCol="0" anchor="ctr"/>
           <a:lstStyle/>
           <a:p>
             <a:pPr algn="ctr"/>
@@ -5873,7 +5880,7 @@
                 </a:solidFill>
                 <a:latin typeface="Calibri"/>
               </a:rPr>
-              <a:t>The corrected test — the only one with own past GPA properly controlled — finds nothing.</a:t>
+              <a:t>School panel model: later GPA on prior GPA, outgoing Katz, direct links, contact GPA, and time effects. Katz = +0.009, p = 0.139.</a:t>
             </a:r>
           </a:p>
         </p:txBody>
@@ -5926,7 +5933,7 @@
 </file>
 
 <file path=ppt/slides/slide7.xml><?xml version="1.0" encoding="utf-8"?>
-<p:sld xmlns:a="http://schemas.openxmlformats.org/drawingml/2006/main" xmlns:p="http://schemas.openxmlformats.org/presentationml/2006/main" xmlns:r="http://schemas.openxmlformats.org/officeDocument/2006/relationships">
+<p:sld xmlns:a="http://schemas.openxmlformats.org/drawingml/2006/main" xmlns:r="http://schemas.openxmlformats.org/officeDocument/2006/relationships" xmlns:p="http://schemas.openxmlformats.org/presentationml/2006/main">
   <p:cSld>
     <p:spTree>
       <p:nvGrpSpPr>
@@ -5934,7 +5941,14 @@
         <p:cNvGrpSpPr/>
         <p:nvPr/>
       </p:nvGrpSpPr>
-      <p:grpSpPr/>
+      <p:grpSpPr>
+        <a:xfrm>
+          <a:off x="0" y="0"/>
+          <a:ext cx="0" cy="0"/>
+          <a:chOff x="0" y="0"/>
+          <a:chExt cx="0" cy="0"/>
+        </a:xfrm>
+      </p:grpSpPr>
       <p:sp>
         <p:nvSpPr>
           <p:cNvPr id="2" name="Rectangle 1"/>
@@ -5976,6 +5990,7 @@
           <a:lstStyle/>
           <a:p>
             <a:pPr algn="ctr"/>
+            <a:endParaRPr/>
           </a:p>
         </p:txBody>
       </p:sp>
@@ -6052,7 +6067,7 @@
                 </a:solidFill>
                 <a:latin typeface="Georgia"/>
               </a:rPr>
-              <a:t>Checked across the whole φ range, not just one value</a:t>
+              <a:t>The school result remains non-significant across the φ range</a:t>
             </a:r>
           </a:p>
         </p:txBody>
@@ -6073,8 +6088,8 @@
         </p:blipFill>
         <p:spPr>
           <a:xfrm>
-            <a:off x="1948996" y="1417320"/>
-            <a:ext cx="8293702" cy="4251960"/>
+            <a:off x="1994610" y="1417320"/>
+            <a:ext cx="8202475" cy="4251960"/>
           </a:xfrm>
           <a:prstGeom prst="rect">
             <a:avLst/>
@@ -6122,7 +6137,7 @@
           </a:fontRef>
         </p:style>
         <p:txBody>
-          <a:bodyPr rtlCol="0" anchor="ctr" wrap="square" lIns="109728" rIns="109728"/>
+          <a:bodyPr wrap="square" lIns="109728" rIns="109728" rtlCol="0" anchor="ctr"/>
           <a:lstStyle/>
           <a:p>
             <a:pPr algn="ctr"/>
@@ -6133,7 +6148,7 @@
                 </a:solidFill>
                 <a:latin typeface="Calibri"/>
               </a:rPr>
-              <a:t>Before the fix, the line swings from significantly positive to significantly negative. After it, it's flat.</a:t>
+              <a:t>Pooled results change with φ; the lagged school estimates are positive but never significant.</a:t>
             </a:r>
           </a:p>
         </p:txBody>
@@ -6186,7 +6201,7 @@
 </file>
 
 <file path=ppt/slides/slide8.xml><?xml version="1.0" encoding="utf-8"?>
-<p:sld xmlns:a="http://schemas.openxmlformats.org/drawingml/2006/main" xmlns:p="http://schemas.openxmlformats.org/presentationml/2006/main" xmlns:r="http://schemas.openxmlformats.org/officeDocument/2006/relationships">
+<p:sld xmlns:a="http://schemas.openxmlformats.org/drawingml/2006/main" xmlns:r="http://schemas.openxmlformats.org/officeDocument/2006/relationships" xmlns:p="http://schemas.openxmlformats.org/presentationml/2006/main">
   <p:cSld>
     <p:spTree>
       <p:nvGrpSpPr>
@@ -6194,7 +6209,14 @@
         <p:cNvGrpSpPr/>
         <p:nvPr/>
       </p:nvGrpSpPr>
-      <p:grpSpPr/>
+      <p:grpSpPr>
+        <a:xfrm>
+          <a:off x="0" y="0"/>
+          <a:ext cx="0" cy="0"/>
+          <a:chOff x="0" y="0"/>
+          <a:chExt cx="0" cy="0"/>
+        </a:xfrm>
+      </p:grpSpPr>
       <p:sp>
         <p:nvSpPr>
           <p:cNvPr id="2" name="Rectangle 1"/>
@@ -6236,6 +6258,7 @@
           <a:lstStyle/>
           <a:p>
             <a:pPr algn="ctr"/>
+            <a:endParaRPr/>
           </a:p>
         </p:txBody>
       </p:sp>
@@ -6273,7 +6296,7 @@
                 </a:solidFill>
                 <a:latin typeface="Calibri"/>
               </a:rPr>
-              <a:t>CONCLUSION</a:t>
+              <a:t>PRESENTATION 2 CONCLUSION</a:t>
             </a:r>
           </a:p>
         </p:txBody>
@@ -6312,7 +6335,7 @@
                 </a:solidFill>
                 <a:latin typeface="Georgia"/>
               </a:rPr>
-              <a:t>What this means</a:t>
+              <a:t>What we can conclude at this stage</a:t>
             </a:r>
           </a:p>
         </p:txBody>
@@ -6356,7 +6379,7 @@
           </a:fontRef>
         </p:style>
         <p:txBody>
-          <a:bodyPr rtlCol="0" anchor="ctr" wrap="none" lIns="73152" rIns="73152"/>
+          <a:bodyPr wrap="none" lIns="73152" rIns="73152" rtlCol="0" anchor="ctr"/>
           <a:lstStyle/>
           <a:p>
             <a:pPr algn="ctr"/>
@@ -6413,7 +6436,7 @@
           </a:fontRef>
         </p:style>
         <p:txBody>
-          <a:bodyPr rtlCol="0" anchor="ctr" wrap="square" lIns="109728" rIns="109728"/>
+          <a:bodyPr wrap="square" lIns="109728" rIns="109728" rtlCol="0" anchor="ctr"/>
           <a:lstStyle/>
           <a:p>
             <a:pPr algn="ctr"/>
@@ -6424,7 +6447,7 @@
                 </a:solidFill>
                 <a:latin typeface="Calibri"/>
               </a:rPr>
-              <a:t>Net of popularity, friend GPA, and a student's own past performance, we find no evidence that network position independently predicts grades.</a:t>
+              <a:t>The initial association did not survive the model audit. In the usable longitudinal sample, we find no statistically significant evidence that outgoing network reach predicts later grades.</a:t>
             </a:r>
           </a:p>
         </p:txBody>
@@ -6470,7 +6493,7 @@
           </a:fontRef>
         </p:style>
         <p:txBody>
-          <a:bodyPr rtlCol="0" anchor="ctr" wrap="square" lIns="109728" rIns="109728"/>
+          <a:bodyPr wrap="square" lIns="109728" rIns="109728" rtlCol="0" anchor="ctr"/>
           <a:lstStyle/>
           <a:p>
             <a:pPr algn="ctr"/>
@@ -6481,7 +6504,7 @@
                 </a:solidFill>
                 <a:latin typeface="Calibri"/>
               </a:rPr>
-              <a:t>1st</a:t>
+              <a:t>t+1</a:t>
             </a:r>
           </a:p>
         </p:txBody>
@@ -6520,7 +6543,7 @@
                 </a:solidFill>
                 <a:latin typeface="Calibri"/>
               </a:rPr>
-              <a:t>First real test</a:t>
+              <a:t>Time order</a:t>
             </a:r>
           </a:p>
         </p:txBody>
@@ -6559,7 +6582,7 @@
                 </a:solidFill>
                 <a:latin typeface="Calibri"/>
               </a:rPr>
-              <a:t>Time lag + own-performance control — a cross-section couldn't support this.</a:t>
+              <a:t>The primary model predicts later GPA from the earlier network.</a:t>
             </a:r>
           </a:p>
         </p:txBody>
@@ -6605,7 +6628,7 @@
           </a:fontRef>
         </p:style>
         <p:txBody>
-          <a:bodyPr rtlCol="0" anchor="ctr" wrap="square" lIns="109728" rIns="109728"/>
+          <a:bodyPr wrap="square" lIns="109728" rIns="109728" rtlCol="0" anchor="ctr"/>
           <a:lstStyle/>
           <a:p>
             <a:pPr algn="ctr"/>
@@ -6655,7 +6678,7 @@
                 </a:solidFill>
                 <a:latin typeface="Calibri"/>
               </a:rPr>
-              <a:t>A general risk</a:t>
+              <a:t>Interpretation</a:t>
             </a:r>
           </a:p>
         </p:txBody>
@@ -6694,7 +6717,7 @@
                 </a:solidFill>
                 <a:latin typeface="Calibri"/>
               </a:rPr>
-              <a:t>Pooling mismatched data structures can manufacture a false-positive coefficient.</a:t>
+              <a:t>The university association remains descriptive, not causal.</a:t>
             </a:r>
           </a:p>
         </p:txBody>
@@ -6740,7 +6763,7 @@
           </a:fontRef>
         </p:style>
         <p:txBody>
-          <a:bodyPr rtlCol="0" anchor="ctr" wrap="square" lIns="109728" rIns="109728"/>
+          <a:bodyPr wrap="square" lIns="109728" rIns="109728" rtlCol="0" anchor="ctr"/>
           <a:lstStyle/>
           <a:p>
             <a:pPr algn="ctr"/>
@@ -6751,7 +6774,7 @@
                 </a:solidFill>
                 <a:latin typeface="Calibri"/>
               </a:rPr>
-              <a:t>→</a:t>
+              <a:t>P3</a:t>
             </a:r>
           </a:p>
         </p:txBody>
@@ -6790,7 +6813,7 @@
                 </a:solidFill>
                 <a:latin typeface="Calibri"/>
               </a:rPr>
-              <a:t>Decision-relevant</a:t>
+              <a:t>Next step</a:t>
             </a:r>
           </a:p>
         </p:txBody>
@@ -6829,7 +6852,7 @@
                 </a:solidFill>
                 <a:latin typeface="Calibri"/>
               </a:rPr>
-              <a:t>Network-reach interventions aren't supported once confounds are controlled.</a:t>
+              <a:t>We will analyse incentives and mechanisms before making recommendations.</a:t>
             </a:r>
           </a:p>
         </p:txBody>
@@ -6882,7 +6905,7 @@
 </file>
 
 <file path=ppt/slides/slide9.xml><?xml version="1.0" encoding="utf-8"?>
-<p:sld xmlns:a="http://schemas.openxmlformats.org/drawingml/2006/main" xmlns:p="http://schemas.openxmlformats.org/presentationml/2006/main" xmlns:r="http://schemas.openxmlformats.org/officeDocument/2006/relationships">
+<p:sld xmlns:a="http://schemas.openxmlformats.org/drawingml/2006/main" xmlns:r="http://schemas.openxmlformats.org/officeDocument/2006/relationships" xmlns:p="http://schemas.openxmlformats.org/presentationml/2006/main">
   <p:cSld>
     <p:spTree>
       <p:nvGrpSpPr>
@@ -6890,7 +6913,14 @@
         <p:cNvGrpSpPr/>
         <p:nvPr/>
       </p:nvGrpSpPr>
-      <p:grpSpPr/>
+      <p:grpSpPr>
+        <a:xfrm>
+          <a:off x="0" y="0"/>
+          <a:ext cx="0" cy="0"/>
+          <a:chOff x="0" y="0"/>
+          <a:chExt cx="0" cy="0"/>
+        </a:xfrm>
+      </p:grpSpPr>
       <p:sp>
         <p:nvSpPr>
           <p:cNvPr id="2" name="Rectangle 1"/>
@@ -6932,6 +6962,7 @@
           <a:lstStyle/>
           <a:p>
             <a:pPr algn="ctr"/>
+            <a:endParaRPr/>
           </a:p>
         </p:txBody>
       </p:sp>
@@ -6969,7 +7000,7 @@
                 </a:solidFill>
                 <a:latin typeface="Calibri"/>
               </a:rPr>
-              <a:t>LIMITATIONS AND WHAT'S NEXT</a:t>
+              <a:t>PRESENTATION 3 SCOPE</a:t>
             </a:r>
           </a:p>
         </p:txBody>
@@ -7008,7 +7039,7 @@
                 </a:solidFill>
                 <a:latin typeface="Georgia"/>
               </a:rPr>
-              <a:t>Where this is still open</a:t>
+              <a:t>Questions reserved for the final presentation</a:t>
             </a:r>
           </a:p>
         </p:txBody>
@@ -7050,7 +7081,7 @@
                 </a:solidFill>
                 <a:latin typeface="Calibri"/>
               </a:rPr>
-              <a:t>  •  n = 2,088   </a:t>
+              <a:t>  •  Mechanism   </a:t>
             </a:r>
             <a:r>
               <a:rPr sz="1500">
@@ -7059,7 +7090,7 @@
                 </a:solidFill>
                 <a:latin typeface="Calibri"/>
               </a:rPr>
-              <a:t>535 students — a much wider CI than the pooled 36,696</a:t>
+              <a:t>Why might students form academically useful links, and when would indirect reach matter?</a:t>
             </a:r>
           </a:p>
           <a:p>
@@ -7078,7 +7109,7 @@
                 </a:solidFill>
                 <a:latin typeface="Calibri"/>
               </a:rPr>
-              <a:t>  •  static GPA   </a:t>
+              <a:t>  •  Incentives   </a:t>
             </a:r>
             <a:r>
               <a:rPr sz="1500">
@@ -7087,7 +7118,7 @@
                 </a:solidFill>
                 <a:latin typeface="Calibri"/>
               </a:rPr>
-              <a:t>can't extend to university cohorts — no time series there</a:t>
+              <a:t>Use a network-economics model to analyse link formation, information access, and peer effects.</a:t>
             </a:r>
           </a:p>
           <a:p>
@@ -7106,7 +7137,7 @@
                 </a:solidFill>
                 <a:latin typeface="Calibri"/>
               </a:rPr>
-              <a:t>  •  not yet run   </a:t>
+              <a:t>  •  Decision   </a:t>
             </a:r>
             <a:r>
               <a:rPr sz="1500">
@@ -7115,7 +7146,7 @@
                 </a:solidFill>
                 <a:latin typeface="Calibri"/>
               </a:rPr>
-              <a:t>betweenness / eigenvector centrality under the corrected design</a:t>
+              <a:t>Translate the final evidence into a cautious recommendation for a non-expert manager.</a:t>
             </a:r>
           </a:p>
         </p:txBody>
@@ -7154,7 +7185,7 @@
                 </a:solidFill>
                 <a:latin typeface="Calibri"/>
               </a:rPr>
-              <a:t>Next: recompute centrality using only mutually-confirmed ties, shown below.</a:t>
+              <a:t>Before then, the remaining empirical checks are incoming status and reciprocal ties; neither is significant in the current robustness results.</a:t>
             </a:r>
           </a:p>
         </p:txBody>
